--- a/slides/week02/AI모빌리티_02_머신러닝개요.pptx
+++ b/slides/week02/AI모빌리티_02_머신러닝개요.pptx
@@ -29,6 +29,9 @@
     <p:sldId id="277" r:id="rId28"/>
     <p:sldId id="278" r:id="rId29"/>
     <p:sldId id="279" r:id="rId30"/>
+    <p:sldId id="280" r:id="rId31"/>
+    <p:sldId id="281" r:id="rId32"/>
+    <p:sldId id="282" r:id="rId33"/>
   </p:sldIdLst>
   <p:notesMasterIdLst>
     <p:notesMasterId r:id="rId15"/>
@@ -594,7 +597,7 @@
           <a:lstStyle/>
           <a:p>
             <a:r>
-              <a:t>토론거리: 특정 도로에 몰린 관측치로 지역 전체를 설명할 수 있는가.</a:t>
+              <a:t>교재 1.4.3. OECD 더 나은 삶의 지표와 세계 은행의 1인당 GDP를 합친 예제다. 클래스 이름만 바꾸면 두 방식을 교체할 수 있다. 프로젝트의 형태는 데이터 분석, 모델 선택, 훈련, 예측 순이고 마지막 단계를 추론이라 부른다.</a:t>
             </a:r>
           </a:p>
         </p:txBody>
@@ -664,7 +667,7 @@
           <a:lstStyle/>
           <a:p>
             <a:r>
-              <a:t>학생이 가장 오래 헷갈리는 지점. 다음 장에서 처방으로 넘어간다.</a:t>
+              <a:t>교재 1.5.1~1.5.2(p.54). 데이터가 많으면 알고리즘 차이가 줄어든다는 결과가 있지만 교재는 곧바로 단서를 단다. 중소 규모 데이터셋이 흔하다. 1936년 미국 대선 여론조사는 부유층 편중과 비응답 편향이 겹친 사례다. 방학이나 특정 시간대만 뽑아 훈련하면 같은 편향이 생긴다.</a:t>
             </a:r>
           </a:p>
         </p:txBody>
@@ -734,7 +737,7 @@
           <a:lstStyle/>
           <a:p>
             <a:r>
-              <a:t>파라미터와 하이퍼파라미터의 구분은 4주차 규제에서 수식으로 다시 나온다.</a:t>
+              <a:t>교재 1.5.3~1.5.4. 엉터리가 들어가면 엉터리가 나온다. 3주차 Ch2의 전처리 파이프라인이 이 두 절의 실행판이다. 모빌리티 특성의 예는 남은 정류장 수, 남은 거리, 최근 세 구간의 평균 통행시간이다.</a:t>
             </a:r>
           </a:p>
         </p:txBody>
@@ -804,7 +807,7 @@
           <a:lstStyle/>
           <a:p>
             <a:r>
-              <a:t>일반화 오차는 외부 샘플 오차라고도 부른다.</a:t>
+              <a:t>교재 1.5.5. 데이터의 양과 잡음에 비해 모델이 너무 복잡할 때 일어난다. 대응은 단순한 모델, 데이터 추가, 잡음 감소 세 가지다. 하이퍼파라미터는 모델이 아니라 학습 알고리즘의 파라미터이고 훈련 중에는 상수로 남는다.</a:t>
             </a:r>
           </a:p>
         </p:txBody>
@@ -874,7 +877,7 @@
           <a:lstStyle/>
           <a:p>
             <a:r>
-              <a:t>검증 세트는 개발 세트라고도 부른다. 공짜 점심 없음 정리는 구두로만.</a:t>
+              <a:t>교재 1.5.6~1.5.7. 파라미터와 하이퍼파라미터의 구분은 4주차 규제에서 수식으로 다시 나온다. 학습 곡선도 4주차에서 다룬다.</a:t>
             </a:r>
           </a:p>
         </p:txBody>
@@ -944,7 +947,7 @@
           <a:lstStyle/>
           <a:p>
             <a:r>
-              <a:t>학기 내내 반복될 주제. 5주차 실습과 팀 프로젝트에서 데이터 누수로 다시 나온다.</a:t>
+              <a:t>교재 1.6(p.62). 사이킷런 `train_test_split`의 기본값은 25퍼센트다. 샘플이 천만 개면 1퍼센트만 떼어도 십만 개라 추정에 충분하다.</a:t>
             </a:r>
           </a:p>
         </p:txBody>
@@ -1014,7 +1017,7 @@
           <a:lstStyle/>
           <a:p>
             <a:r>
-              <a:t>목표 세 가지를 다시 확인하고 마무리한다.</a:t>
+              <a:t>교재 1.6.1. 절차는 검증 세트 분리, 후보 훈련, 검증에서 선택, 전체 훈련 세트로 재훈련, 테스트에서 평가 순이다. 교차 검증은 훈련 시간이 검증 세트 수에 비례해 늘어난다.</a:t>
             </a:r>
           </a:p>
         </p:txBody>
@@ -1084,7 +1087,147 @@
           <a:lstStyle/>
           <a:p>
             <a:r>
-              <a:t>과제는 5주차에 배포한다. 2~4주차는 이론과 실습에 집중한다.</a:t>
+              <a:t>교재 1.6.2. 웹에서 내려받은 꽃 사진과 모바일 앱으로 찍은 사진의 예다. 공짜 점심 없음 이론은 구두로만 언급한다. 월퍼트가 1996년에 보인 것으로, 데이터에 아무 가정도 하지 않으면 한 모델을 다른 모델보다 선호할 근거가 없다는 내용이다.</a:t>
+            </a:r>
+          </a:p>
+        </p:txBody>
+      </p:sp>
+      <p:sp>
+        <p:nvSpPr>
+          <p:cNvPr id="4" name="Slide Number Placeholder 3"/>
+          <p:cNvSpPr>
+            <a:spLocks noGrp="1"/>
+          </p:cNvSpPr>
+          <p:nvPr>
+            <p:ph type="sldNum" idx="5" sz="quarter"/>
+          </p:nvPr>
+        </p:nvSpPr>
+        <p:spPr/>
+      </p:sp>
+    </p:spTree>
+  </p:cSld>
+  <p:clrMapOvr>
+    <a:masterClrMapping/>
+  </p:clrMapOvr>
+</p:notes>
+</file>
+
+<file path=ppt/notesSlides/notesSlide18.xml><?xml version="1.0" encoding="utf-8"?>
+<p:notes xmlns:a="http://schemas.openxmlformats.org/drawingml/2006/main" xmlns:p="http://schemas.openxmlformats.org/presentationml/2006/main" xmlns:r="http://schemas.openxmlformats.org/officeDocument/2006/relationships">
+  <p:cSld>
+    <p:spTree>
+      <p:nvGrpSpPr>
+        <p:cNvPr id="1" name=""/>
+        <p:cNvGrpSpPr/>
+        <p:nvPr/>
+      </p:nvGrpSpPr>
+      <p:grpSpPr>
+        <a:xfrm>
+          <a:off x="0" y="0"/>
+          <a:ext cx="0" cy="0"/>
+          <a:chOff x="0" y="0"/>
+          <a:chExt cx="0" cy="0"/>
+        </a:xfrm>
+      </p:grpSpPr>
+      <p:sp>
+        <p:nvSpPr>
+          <p:cNvPr id="2" name="Slide Image Placeholder 1"/>
+          <p:cNvSpPr>
+            <a:spLocks noGrp="1"/>
+          </p:cNvSpPr>
+          <p:nvPr>
+            <p:ph type="sldImg" idx="2"/>
+          </p:nvPr>
+        </p:nvSpPr>
+        <p:spPr/>
+      </p:sp>
+      <p:sp>
+        <p:nvSpPr>
+          <p:cNvPr id="3" name="Notes Placeholder 2"/>
+          <p:cNvSpPr>
+            <a:spLocks noGrp="1"/>
+          </p:cNvSpPr>
+          <p:nvPr>
+            <p:ph type="body" idx="3" sz="quarter"/>
+          </p:nvPr>
+        </p:nvSpPr>
+        <p:spPr/>
+        <p:txBody>
+          <a:bodyPr/>
+          <a:lstStyle/>
+          <a:p>
+            <a:r>
+              <a:t>교재 1장에는 없지만 ETA 프로젝트에 필요해 여기서 미리 짚는다. 무작위 분할이 왜 실제 운영 성능을 부풀리는지 그림으로 확인한다. 3주차 데이터 분할과 팀 프로젝트에서 데이터 누수로 다시 나온다.</a:t>
+            </a:r>
+          </a:p>
+        </p:txBody>
+      </p:sp>
+      <p:sp>
+        <p:nvSpPr>
+          <p:cNvPr id="4" name="Slide Number Placeholder 3"/>
+          <p:cNvSpPr>
+            <a:spLocks noGrp="1"/>
+          </p:cNvSpPr>
+          <p:nvPr>
+            <p:ph type="sldNum" idx="5" sz="quarter"/>
+          </p:nvPr>
+        </p:nvSpPr>
+        <p:spPr/>
+      </p:sp>
+    </p:spTree>
+  </p:cSld>
+  <p:clrMapOvr>
+    <a:masterClrMapping/>
+  </p:clrMapOvr>
+</p:notes>
+</file>
+
+<file path=ppt/notesSlides/notesSlide19.xml><?xml version="1.0" encoding="utf-8"?>
+<p:notes xmlns:a="http://schemas.openxmlformats.org/drawingml/2006/main" xmlns:p="http://schemas.openxmlformats.org/presentationml/2006/main" xmlns:r="http://schemas.openxmlformats.org/officeDocument/2006/relationships">
+  <p:cSld>
+    <p:spTree>
+      <p:nvGrpSpPr>
+        <p:cNvPr id="1" name=""/>
+        <p:cNvGrpSpPr/>
+        <p:nvPr/>
+      </p:nvGrpSpPr>
+      <p:grpSpPr>
+        <a:xfrm>
+          <a:off x="0" y="0"/>
+          <a:ext cx="0" cy="0"/>
+          <a:chOff x="0" y="0"/>
+          <a:chExt cx="0" cy="0"/>
+        </a:xfrm>
+      </p:grpSpPr>
+      <p:sp>
+        <p:nvSpPr>
+          <p:cNvPr id="2" name="Slide Image Placeholder 1"/>
+          <p:cNvSpPr>
+            <a:spLocks noGrp="1"/>
+          </p:cNvSpPr>
+          <p:nvPr>
+            <p:ph type="sldImg" idx="2"/>
+          </p:nvPr>
+        </p:nvSpPr>
+        <p:spPr/>
+      </p:sp>
+      <p:sp>
+        <p:nvSpPr>
+          <p:cNvPr id="3" name="Notes Placeholder 2"/>
+          <p:cNvSpPr>
+            <a:spLocks noGrp="1"/>
+          </p:cNvSpPr>
+          <p:nvPr>
+            <p:ph type="body" idx="3" sz="quarter"/>
+          </p:nvPr>
+        </p:nvSpPr>
+        <p:spPr/>
+        <p:txBody>
+          <a:bodyPr/>
+          <a:lstStyle/>
+          <a:p>
+            <a:r>
+              <a:t>교재 1.5.7의 핵심 요약을 따라 목표 세 가지를 닫는다.</a:t>
             </a:r>
           </a:p>
         </p:txBody>
@@ -1154,7 +1297,77 @@
           <a:lstStyle/>
           <a:p>
             <a:r>
-              <a:t>1.7 연습문제는 다루지 않는다. 수요일 실습은 개발 환경 세팅으로 따로 진행한다.</a:t>
+              <a:t>교재를 펴고 따라오게 한다. 이 장은 교재에서 코드가 거의 없는 유일한 장이고, 저자는 나머지를 읽기 전에 이 장을 모두 이해할 것을 요구한다. 수요일 실습은 개발 환경 세팅으로 따로 진행한다.</a:t>
+            </a:r>
+          </a:p>
+        </p:txBody>
+      </p:sp>
+      <p:sp>
+        <p:nvSpPr>
+          <p:cNvPr id="4" name="Slide Number Placeholder 3"/>
+          <p:cNvSpPr>
+            <a:spLocks noGrp="1"/>
+          </p:cNvSpPr>
+          <p:nvPr>
+            <p:ph type="sldNum" idx="5" sz="quarter"/>
+          </p:nvPr>
+        </p:nvSpPr>
+        <p:spPr/>
+      </p:sp>
+    </p:spTree>
+  </p:cSld>
+  <p:clrMapOvr>
+    <a:masterClrMapping/>
+  </p:clrMapOvr>
+</p:notes>
+</file>
+
+<file path=ppt/notesSlides/notesSlide20.xml><?xml version="1.0" encoding="utf-8"?>
+<p:notes xmlns:a="http://schemas.openxmlformats.org/drawingml/2006/main" xmlns:p="http://schemas.openxmlformats.org/presentationml/2006/main" xmlns:r="http://schemas.openxmlformats.org/officeDocument/2006/relationships">
+  <p:cSld>
+    <p:spTree>
+      <p:nvGrpSpPr>
+        <p:cNvPr id="1" name=""/>
+        <p:cNvGrpSpPr/>
+        <p:nvPr/>
+      </p:nvGrpSpPr>
+      <p:grpSpPr>
+        <a:xfrm>
+          <a:off x="0" y="0"/>
+          <a:ext cx="0" cy="0"/>
+          <a:chOff x="0" y="0"/>
+          <a:chExt cx="0" cy="0"/>
+        </a:xfrm>
+      </p:grpSpPr>
+      <p:sp>
+        <p:nvSpPr>
+          <p:cNvPr id="2" name="Slide Image Placeholder 1"/>
+          <p:cNvSpPr>
+            <a:spLocks noGrp="1"/>
+          </p:cNvSpPr>
+          <p:nvPr>
+            <p:ph type="sldImg" idx="2"/>
+          </p:nvPr>
+        </p:nvSpPr>
+        <p:spPr/>
+      </p:sp>
+      <p:sp>
+        <p:nvSpPr>
+          <p:cNvPr id="3" name="Notes Placeholder 2"/>
+          <p:cNvSpPr>
+            <a:spLocks noGrp="1"/>
+          </p:cNvSpPr>
+          <p:nvPr>
+            <p:ph type="body" idx="3" sz="quarter"/>
+          </p:nvPr>
+        </p:nvSpPr>
+        <p:spPr/>
+        <p:txBody>
+          <a:bodyPr/>
+          <a:lstStyle/>
+          <a:p>
+            <a:r>
+              <a:t>과제는 5주차에 배포한다. 2~4주차는 이론과 수요일 실습에 집중한다.</a:t>
             </a:r>
           </a:p>
         </p:txBody>
@@ -1224,7 +1437,7 @@
           <a:lstStyle/>
           <a:p>
             <a:r>
-              <a:t>학생에게 버스 도착시간 예측을 T·E·P에 대입해 보게 한다.</a:t>
+              <a:t>교재 1.1(p.28). 용어 세 가지를 여기서 정한다. 훈련 세트, 훈련 사례(샘플), 모델. 학생에게 버스 도착시간 예측을 T·P·E에 대입해 보게 한다.</a:t>
             </a:r>
           </a:p>
         </p:txBody>
@@ -1294,7 +1507,7 @@
           <a:lstStyle/>
           <a:p>
             <a:r>
-              <a:t>두 루프를 판서로 나란히 그린다. 교재 그림 1-2와 1-3.</a:t>
+              <a:t>교재 1.2(p.29). 발송자가 `4U` 대신 `For U`를 쓰면 전통적 필터는 사람이 규칙을 고쳐야 하지만 머신러닝 필터는 스스로 인식한다. 뛰어난 분야 네 가지를 짚는다. 수동 조정이 많은 문제, 전통적 방식으로 풀 수 없는 문제, 유동적인 환경, 대량 데이터에서 인사이트 얻기.</a:t>
             </a:r>
           </a:p>
         </p:txBody>
@@ -1364,7 +1577,7 @@
           <a:lstStyle/>
           <a:p>
             <a:r>
-              <a:t>교재 1.3의 응용 사례는 교통 분야 예시로 바꿔 든다.</a:t>
+              <a:t>교재 1.3(p.32). 통행시간·통행속도·ETA는 모두 회귀에 속한다. 교재의 회귀 행이 선형 회귀에서 랜덤 포레스트, 신경망, 트랜스포머로 이어지는데 이 수업이 그 순서를 그대로 따라간다.</a:t>
             </a:r>
           </a:p>
         </p:txBody>
@@ -1434,7 +1647,7 @@
           <a:lstStyle/>
           <a:p>
             <a:r>
-              <a:t>학생들이 트리 구조로 오해하기 쉬운 지점. 조합 가능한 좌표축이라고 못 박는다.</a:t>
+              <a:t>교재 1.4(p.34) 도입부. 학생들이 트리 구조로 오해하기 쉬운 지점이다. 교재의 예는 심층 신경망으로 실시간 학습하는 스팸 필터로 온라인·모델 기반·지도 학습이다. ETA 모델은 배치·모델 기반·지도 학습이라고 대응시킨다.</a:t>
             </a:r>
           </a:p>
         </p:txBody>
@@ -1504,7 +1717,7 @@
           <a:lstStyle/>
           <a:p>
             <a:r>
-              <a:t>특성·예측 변수·속성은 같은 말. 로지스틱 '회귀'는 이름과 달리 분류기.</a:t>
+              <a:t>교재 1.4.1 앞부분. 타깃은 회귀에서, 레이블은 분류에서 주로 쓴다. 로지스틱 회귀는 클래스에 속할 확률을 출력하는 분류 모델이다. 상관관계 있는 특성을 합치는 것이 특성 추출이다.</a:t>
             </a:r>
           </a:p>
         </p:txBody>
@@ -1574,7 +1787,7 @@
           <a:lstStyle/>
           <a:p>
             <a:r>
-              <a:t>외부 메모리 학습은 이름과 달리 보통 오프라인 실행. 나쁜 데이터 주입 위험은 구두로.</a:t>
+              <a:t>교재 1.4.1 뒷부분. 준지도는 대부분 지도와 비지도의 조합이다. 자기 지도는 훈련 중 생성된 레이블을 쓰고 목표가 분류·회귀라서 교재가 별개 범주로 둔다. 알파고는 대국 때 학습을 끄고 적용만 했다.</a:t>
             </a:r>
           </a:p>
         </p:txBody>
@@ -1644,7 +1857,7 @@
           <a:lstStyle/>
           <a:p>
             <a:r>
-              <a:t>OECD 삶의 만족도 예제. '모델'의 세 가지 의미(종류·구조·훈련 결과)는 시험 단골.</a:t>
+              <a:t>교재 1.4.2. 외부 메모리 학습은 보통 오프라인으로 실행하므로 점진적 학습으로 생각하는 편이 낫다. 온라인 시스템은 나쁜 데이터가 들어오면 성능이 빠르게 떨어져 감시가 필요하다. 이 수업은 재현 가능한 비교를 위해 배치 학습을 쓴다.</a:t>
             </a:r>
           </a:p>
         </p:txBody>
@@ -5191,7 +5404,7 @@
           <a:lstStyle/>
           <a:p>
             <a:r>
-              <a:t>머신러닝 개요</a:t>
+              <a:t>한눈에 보는 머신러닝</a:t>
             </a:r>
           </a:p>
         </p:txBody>
@@ -5212,7 +5425,7 @@
           <a:lstStyle/>
           <a:p>
             <a:r>
-              <a:t>핸즈온 Ch1 — 시스템의 종류, 과대적합, 검증</a:t>
+              <a:t>핸즈온 머신러닝 3판 1장</a:t>
             </a:r>
           </a:p>
         </p:txBody>
@@ -5293,7 +5506,7 @@
           <a:lstStyle/>
           <a:p>
             <a:r>
-              <a:t>2.2 훈련 지도 방식</a:t>
+              <a:t>2.2 지도 학습과 비지도 학습</a:t>
             </a:r>
           </a:p>
         </p:txBody>
@@ -5336,37 +5549,49 @@
           <a:p>
             <a:pPr/>
             <a:r>
-              <a:t>지도 학습: 정답 레이블이 있는 데이터로 학습</a:t>
+              <a:rPr b="1">
+                <a:latin typeface="Pretendard"/>
+              </a:rPr>
+              <a:t>지도 학습</a:t>
+            </a:r>
+            <a:r>
+              <a:t> — 훈련 데이터에 레이블 포함</a:t>
             </a:r>
           </a:p>
           <a:p>
             <a:pPr lvl="1"/>
             <a:r>
-              <a:t>분류(스팸 여부)와 회귀(속도·가격)</a:t>
+              <a:t>분류(스팸 필터), 회귀(중고차 가격)</a:t>
+            </a:r>
+          </a:p>
+          <a:p>
+            <a:pPr lvl="1"/>
+            <a:r>
+              <a:t>특성은 예측 변수·속성으로도 부름</a:t>
             </a:r>
           </a:p>
           <a:p>
             <a:pPr/>
             <a:r>
-              <a:t>비지도 학습: 레이블 없이 구조를 발견</a:t>
+              <a:rPr b="1">
+                <a:latin typeface="Pretendard"/>
+              </a:rPr>
+              <a:t>비지도 학습</a:t>
+            </a:r>
+            <a:r>
+              <a:t> — 레이블 없이 학습</a:t>
             </a:r>
           </a:p>
           <a:p>
             <a:pPr lvl="1"/>
             <a:r>
-              <a:t>군집, 차원 축소, 이상치 탐지</a:t>
-            </a:r>
-          </a:p>
-          <a:p>
-            <a:pPr/>
-            <a:r>
-              <a:t>준지도: 일부만 레이블 / 자기 지도: 레이블을 스스로 생성</a:t>
-            </a:r>
-          </a:p>
-          <a:p>
-            <a:pPr/>
-            <a:r>
-              <a:t>강화 학습: 보상 신호로 정책 학습 — 알파고</a:t>
+              <a:t>군집, 시각화, 차원 축소</a:t>
+            </a:r>
+          </a:p>
+          <a:p>
+            <a:pPr lvl="1"/>
+            <a:r>
+              <a:t>이상치 탐지, 특이치 탐지, 연관 규칙 학습</a:t>
             </a:r>
           </a:p>
         </p:txBody>
@@ -5453,7 +5678,7 @@
           <a:lstStyle/>
           <a:p>
             <a:r>
-              <a:t>2.3 배치 학습과 온라인 학습</a:t>
+              <a:t>2.3 준지도·자기 지도·강화 학습</a:t>
             </a:r>
           </a:p>
         </p:txBody>
@@ -5496,31 +5721,55 @@
           <a:p>
             <a:pPr/>
             <a:r>
-              <a:t>배치 학습: 전체 데이터로 한 번에 훈련한 뒤 배포</a:t>
+              <a:rPr b="1">
+                <a:latin typeface="Pretendard"/>
+              </a:rPr>
+              <a:t>준지도 학습</a:t>
+            </a:r>
+            <a:r>
+              <a:t> — 레이블이 일부에만 있음</a:t>
             </a:r>
           </a:p>
           <a:p>
             <a:pPr lvl="1"/>
             <a:r>
-              <a:t>새 데이터가 쌓이면 처음부터 다시 훈련</a:t>
+              <a:t>구글 포토의 인물 묶기</a:t>
             </a:r>
           </a:p>
           <a:p>
             <a:pPr/>
             <a:r>
-              <a:t>온라인 학습: 미니배치로 점진적 훈련</a:t>
+              <a:rPr b="1">
+                <a:latin typeface="Pretendard"/>
+              </a:rPr>
+              <a:t>자기 지도 학습</a:t>
+            </a:r>
+            <a:r>
+              <a:t> — 레이블을 데이터에서 생성</a:t>
             </a:r>
           </a:p>
           <a:p>
             <a:pPr lvl="1"/>
             <a:r>
-              <a:t>학습률이 높으면 과거를 빨리 잊음</a:t>
+              <a:t>가린 이미지를 복원하도록 훈련</a:t>
+            </a:r>
+          </a:p>
+          <a:p>
+            <a:pPr lvl="1"/>
+            <a:r>
+              <a:t>미세 튜닝과 전이 학습으로 연결</a:t>
             </a:r>
           </a:p>
           <a:p>
             <a:pPr/>
             <a:r>
-              <a:t>모델 부패와 데이터 드리프트 — 성능은 시간이 지나며 떨어짐</a:t>
+              <a:rPr b="1">
+                <a:latin typeface="Pretendard"/>
+              </a:rPr>
+              <a:t>강화 학습</a:t>
+            </a:r>
+            <a:r>
+              <a:t> — 에이전트가 보상으로 정책 학습</a:t>
             </a:r>
           </a:p>
         </p:txBody>
@@ -5607,7 +5856,7 @@
           <a:lstStyle/>
           <a:p>
             <a:r>
-              <a:t>2.4 사례 기반과 모델 기반</a:t>
+              <a:t>2.4 배치 학습과 온라인 학습</a:t>
             </a:r>
           </a:p>
         </p:txBody>
@@ -5650,19 +5899,31 @@
           <a:p>
             <a:pPr/>
             <a:r>
-              <a:t>모델 기반: 경향을 식으로 요약한 뒤 예측</a:t>
+              <a:t>배치: 가용 데이터 전체로</a:t>
             </a:r>
           </a:p>
           <a:p>
             <a:pPr/>
             <a:r>
-              <a:t>사례 기반: 가까운 이웃과 비교해 예측</a:t>
+              <a:t>오프라인 학습이라고도 함</a:t>
             </a:r>
           </a:p>
           <a:p>
             <a:pPr/>
             <a:r>
-              <a:t>사이킷런에서는 클래스 이름만 바꾸면 교체</a:t>
+              <a:t>온라인: 미니배치로 점진</a:t>
+            </a:r>
+          </a:p>
+          <a:p>
+            <a:pPr/>
+            <a:r>
+              <a:t>학습률 높으면 빨리 잊음</a:t>
+            </a:r>
+          </a:p>
+          <a:p>
+            <a:pPr/>
+            <a:r>
+              <a:t>모델 부패와 데이터 드리프트</a:t>
             </a:r>
           </a:p>
         </p:txBody>
@@ -5683,150 +5944,472 @@
           <a:lstStyle/>
           <a:p>
             <a:r>
-              <a:rPr b="1"/>
-              <a:t>import</a:t>
-            </a:r>
-            <a:r>
-              <a:t> pandas </a:t>
-            </a:r>
-            <a:r>
-              <a:rPr b="1"/>
-              <a:t>as</a:t>
-            </a:r>
-            <a:r>
-              <a:t> pd</a:t>
-            </a:r>
-          </a:p>
-          <a:p>
-            <a:r>
-              <a:rPr b="1"/>
-              <a:t>from</a:t>
-            </a:r>
-            <a:r>
-              <a:t> sklearn.linear_model </a:t>
-            </a:r>
-            <a:r>
-              <a:rPr b="1"/>
-              <a:t>import</a:t>
-            </a:r>
-            <a:r>
-              <a:t> LinearRegression</a:t>
-            </a:r>
-          </a:p>
-          <a:p/>
-          <a:p>
-            <a:r>
-              <a:t>df = pd.read_csv("lifesat.csv")   </a:t>
-            </a:r>
-            <a:r>
-              <a:rPr>
-                <a:solidFill>
-                  <a:srgbClr val="5E5E5E"/>
-                </a:solidFill>
-              </a:rPr>
-              <a:t># 1인당 GDP, 삶의 만족도</a:t>
-            </a:r>
-          </a:p>
-          <a:p>
-            <a:r>
-              <a:t>X = df[["gdp_per_capita"]].values</a:t>
-            </a:r>
-          </a:p>
-          <a:p>
-            <a:r>
-              <a:t>y = df["life_satisfaction"].values</a:t>
-            </a:r>
-          </a:p>
-          <a:p/>
-          <a:p>
-            <a:r>
-              <a:t>model = LinearRegression()        </a:t>
-            </a:r>
-            <a:r>
-              <a:rPr>
-                <a:solidFill>
-                  <a:srgbClr val="5E5E5E"/>
-                </a:solidFill>
-              </a:rPr>
-              <a:t># 모델 기반</a:t>
-            </a:r>
-          </a:p>
-          <a:p>
-            <a:r>
-              <a:t>model.fit(X, y)</a:t>
-            </a:r>
-          </a:p>
-          <a:p>
-            <a:r>
-              <a:rPr b="1"/>
-              <a:t>print</a:t>
-            </a:r>
-            <a:r>
-              <a:t>(model.predict([[37_655.2]]))       </a:t>
-            </a:r>
-            <a:r>
-              <a:rPr>
-                <a:solidFill>
-                  <a:srgbClr val="5E5E5E"/>
-                </a:solidFill>
-              </a:rPr>
-              <a:t># (결과) [[6.30]]</a:t>
-            </a:r>
-          </a:p>
-          <a:p/>
-          <a:p>
-            <a:r>
-              <a:rPr b="1"/>
-              <a:t>from</a:t>
-            </a:r>
-            <a:r>
-              <a:t> sklearn.neighbors </a:t>
-            </a:r>
-            <a:r>
-              <a:rPr b="1"/>
-              <a:t>import</a:t>
-            </a:r>
-            <a:r>
-              <a:t> KNeighborsRegressor</a:t>
-            </a:r>
-          </a:p>
-          <a:p>
-            <a:r>
-              <a:t>model = KNeighborsRegressor(n_neighbors=3)   </a:t>
-            </a:r>
-            <a:r>
-              <a:rPr>
-                <a:solidFill>
-                  <a:srgbClr val="5E5E5E"/>
-                </a:solidFill>
-              </a:rPr>
-              <a:t># 사례 기반</a:t>
-            </a:r>
-          </a:p>
-          <a:p>
-            <a:r>
-              <a:t>model.fit(X, y)</a:t>
-            </a:r>
-          </a:p>
-          <a:p>
-            <a:r>
-              <a:rPr b="1"/>
-              <a:t>print</a:t>
-            </a:r>
-            <a:r>
-              <a:t>(model.predict([[37_655.2]]))       </a:t>
-            </a:r>
-            <a:r>
-              <a:rPr>
-                <a:solidFill>
-                  <a:srgbClr val="5E5E5E"/>
-                </a:solidFill>
-              </a:rPr>
-              <a:t># (결과) [[6.33]]</a:t>
-            </a:r>
-          </a:p>
-        </p:txBody>
-      </p:sp>
+              <a:t>표 4. 두 학습 방식의 비교</a:t>
+            </a:r>
+          </a:p>
+        </p:txBody>
+      </p:sp>
+      <p:graphicFrame>
+        <p:nvGraphicFramePr>
+          <p:cNvPr id="6" name="Table Placeholder 5"/>
+          <p:cNvGraphicFramePr>
+            <a:graphicFrameLocks noGrp="1"/>
+          </p:cNvGraphicFramePr>
+          <p:nvPr>
+            <p:ph type="tbl" idx="104"/>
+          </p:nvPr>
+        </p:nvGraphicFramePr>
+        <p:xfrm>
+          <a:off x="4937760" y="1828800"/>
+          <a:ext cx="6565392" cy="2311400"/>
+        </p:xfrm>
+        <a:graphic>
+          <a:graphicData uri="http://schemas.openxmlformats.org/drawingml/2006/table">
+            <a:tbl>
+              <a:tblPr firstRow="0" bandRow="0" firstCol="0" lastRow="0" lastCol="0" bandCol="0"/>
+              <a:tblGrid>
+                <a:gridCol w="2188464"/>
+                <a:gridCol w="2188464"/>
+                <a:gridCol w="2188464"/>
+              </a:tblGrid>
+              <a:tr h="406400">
+                <a:tc>
+                  <a:txBody>
+                    <a:bodyPr/>
+                    <a:lstStyle/>
+                    <a:p>
+                      <a:r>
+                        <a:rPr sz="1300" b="0">
+                          <a:solidFill>
+                            <a:srgbClr val="FFFFFF"/>
+                          </a:solidFill>
+                          <a:latin typeface="Pretendard Medium"/>
+                        </a:rPr>
+                        <a:t>항목</a:t>
+                      </a:r>
+                    </a:p>
+                  </a:txBody>
+                  <a:tcPr marL="101600" marR="101600" marT="76200" marB="76200" anchor="ctr">
+                    <a:solidFill>
+                      <a:srgbClr val="000000"/>
+                    </a:solidFill>
+                    <a:lnL w="0">
+                      <a:noFill/>
+                    </a:lnL>
+                    <a:lnR w="0">
+                      <a:noFill/>
+                    </a:lnR>
+                    <a:lnT w="0">
+                      <a:noFill/>
+                    </a:lnT>
+                    <a:lnB w="0">
+                      <a:noFill/>
+                    </a:lnB>
+                  </a:tcPr>
+                </a:tc>
+                <a:tc>
+                  <a:txBody>
+                    <a:bodyPr/>
+                    <a:lstStyle/>
+                    <a:p>
+                      <a:r>
+                        <a:rPr sz="1300" b="0">
+                          <a:solidFill>
+                            <a:srgbClr val="FFFFFF"/>
+                          </a:solidFill>
+                          <a:latin typeface="Pretendard Medium"/>
+                        </a:rPr>
+                        <a:t>배치 학습</a:t>
+                      </a:r>
+                    </a:p>
+                  </a:txBody>
+                  <a:tcPr marL="101600" marR="101600" marT="76200" marB="76200" anchor="ctr">
+                    <a:solidFill>
+                      <a:srgbClr val="000000"/>
+                    </a:solidFill>
+                    <a:lnL w="0">
+                      <a:noFill/>
+                    </a:lnL>
+                    <a:lnR w="0">
+                      <a:noFill/>
+                    </a:lnR>
+                    <a:lnT w="0">
+                      <a:noFill/>
+                    </a:lnT>
+                    <a:lnB w="0">
+                      <a:noFill/>
+                    </a:lnB>
+                  </a:tcPr>
+                </a:tc>
+                <a:tc>
+                  <a:txBody>
+                    <a:bodyPr/>
+                    <a:lstStyle/>
+                    <a:p>
+                      <a:r>
+                        <a:rPr sz="1300" b="0">
+                          <a:solidFill>
+                            <a:srgbClr val="FFFFFF"/>
+                          </a:solidFill>
+                          <a:latin typeface="Pretendard Medium"/>
+                        </a:rPr>
+                        <a:t>온라인 학습</a:t>
+                      </a:r>
+                    </a:p>
+                  </a:txBody>
+                  <a:tcPr marL="101600" marR="101600" marT="76200" marB="76200" anchor="ctr">
+                    <a:solidFill>
+                      <a:srgbClr val="000000"/>
+                    </a:solidFill>
+                    <a:lnL w="0">
+                      <a:noFill/>
+                    </a:lnL>
+                    <a:lnR w="0">
+                      <a:noFill/>
+                    </a:lnR>
+                    <a:lnT w="0">
+                      <a:noFill/>
+                    </a:lnT>
+                    <a:lnB w="0">
+                      <a:noFill/>
+                    </a:lnB>
+                  </a:tcPr>
+                </a:tc>
+              </a:tr>
+              <a:tr h="635000">
+                <a:tc>
+                  <a:txBody>
+                    <a:bodyPr/>
+                    <a:lstStyle/>
+                    <a:p>
+                      <a:r>
+                        <a:rPr sz="1300" b="1">
+                          <a:solidFill>
+                            <a:srgbClr val="000000"/>
+                          </a:solidFill>
+                          <a:latin typeface="Pretendard"/>
+                        </a:rPr>
+                        <a:t>훈련</a:t>
+                      </a:r>
+                    </a:p>
+                  </a:txBody>
+                  <a:tcPr marL="101600" marR="101600" marT="101600" marB="101600" anchor="ctr">
+                    <a:solidFill>
+                      <a:srgbClr val="FFFFFF"/>
+                    </a:solidFill>
+                    <a:lnL w="0">
+                      <a:noFill/>
+                    </a:lnL>
+                    <a:lnR w="0">
+                      <a:noFill/>
+                    </a:lnR>
+                    <a:lnT w="0">
+                      <a:noFill/>
+                    </a:lnT>
+                    <a:lnB w="9525">
+                      <a:solidFill>
+                        <a:srgbClr val="E2E2E2"/>
+                      </a:solidFill>
+                    </a:lnB>
+                  </a:tcPr>
+                </a:tc>
+                <a:tc>
+                  <a:txBody>
+                    <a:bodyPr/>
+                    <a:lstStyle/>
+                    <a:p>
+                      <a:r>
+                        <a:rPr sz="1300" b="0">
+                          <a:solidFill>
+                            <a:srgbClr val="5E5E5E"/>
+                          </a:solidFill>
+                          <a:latin typeface="Pretendard Medium"/>
+                        </a:rPr>
+                        <a:t>전체를 한 번에</a:t>
+                      </a:r>
+                    </a:p>
+                  </a:txBody>
+                  <a:tcPr marL="101600" marR="101600" marT="101600" marB="101600" anchor="ctr">
+                    <a:solidFill>
+                      <a:srgbClr val="FFFFFF"/>
+                    </a:solidFill>
+                    <a:lnL w="0">
+                      <a:noFill/>
+                    </a:lnL>
+                    <a:lnR w="0">
+                      <a:noFill/>
+                    </a:lnR>
+                    <a:lnT w="0">
+                      <a:noFill/>
+                    </a:lnT>
+                    <a:lnB w="9525">
+                      <a:solidFill>
+                        <a:srgbClr val="E2E2E2"/>
+                      </a:solidFill>
+                    </a:lnB>
+                  </a:tcPr>
+                </a:tc>
+                <a:tc>
+                  <a:txBody>
+                    <a:bodyPr/>
+                    <a:lstStyle/>
+                    <a:p>
+                      <a:r>
+                        <a:rPr sz="1300" b="0">
+                          <a:solidFill>
+                            <a:srgbClr val="5E5E5E"/>
+                          </a:solidFill>
+                          <a:latin typeface="Pretendard Medium"/>
+                        </a:rPr>
+                        <a:t>미니배치 순차</a:t>
+                      </a:r>
+                    </a:p>
+                  </a:txBody>
+                  <a:tcPr marL="101600" marR="101600" marT="101600" marB="101600" anchor="ctr">
+                    <a:solidFill>
+                      <a:srgbClr val="FFFFFF"/>
+                    </a:solidFill>
+                    <a:lnL w="0">
+                      <a:noFill/>
+                    </a:lnL>
+                    <a:lnR w="0">
+                      <a:noFill/>
+                    </a:lnR>
+                    <a:lnT w="0">
+                      <a:noFill/>
+                    </a:lnT>
+                    <a:lnB w="9525">
+                      <a:solidFill>
+                        <a:srgbClr val="E2E2E2"/>
+                      </a:solidFill>
+                    </a:lnB>
+                  </a:tcPr>
+                </a:tc>
+              </a:tr>
+              <a:tr h="635000">
+                <a:tc>
+                  <a:txBody>
+                    <a:bodyPr/>
+                    <a:lstStyle/>
+                    <a:p>
+                      <a:r>
+                        <a:rPr sz="1300" b="1">
+                          <a:solidFill>
+                            <a:srgbClr val="000000"/>
+                          </a:solidFill>
+                          <a:latin typeface="Pretendard"/>
+                        </a:rPr>
+                        <a:t>갱신</a:t>
+                      </a:r>
+                    </a:p>
+                  </a:txBody>
+                  <a:tcPr marL="101600" marR="101600" marT="101600" marB="101600" anchor="ctr">
+                    <a:solidFill>
+                      <a:srgbClr val="FFFFFF"/>
+                    </a:solidFill>
+                    <a:lnL w="0">
+                      <a:noFill/>
+                    </a:lnL>
+                    <a:lnR w="0">
+                      <a:noFill/>
+                    </a:lnR>
+                    <a:lnT w="0">
+                      <a:noFill/>
+                    </a:lnT>
+                    <a:lnB w="9525">
+                      <a:solidFill>
+                        <a:srgbClr val="E2E2E2"/>
+                      </a:solidFill>
+                    </a:lnB>
+                  </a:tcPr>
+                </a:tc>
+                <a:tc>
+                  <a:txBody>
+                    <a:bodyPr/>
+                    <a:lstStyle/>
+                    <a:p>
+                      <a:r>
+                        <a:rPr sz="1300" b="0">
+                          <a:solidFill>
+                            <a:srgbClr val="5E5E5E"/>
+                          </a:solidFill>
+                          <a:latin typeface="Pretendard Medium"/>
+                        </a:rPr>
+                        <a:t>재훈련 후 배포</a:t>
+                      </a:r>
+                    </a:p>
+                  </a:txBody>
+                  <a:tcPr marL="101600" marR="101600" marT="101600" marB="101600" anchor="ctr">
+                    <a:solidFill>
+                      <a:srgbClr val="FFFFFF"/>
+                    </a:solidFill>
+                    <a:lnL w="0">
+                      <a:noFill/>
+                    </a:lnL>
+                    <a:lnR w="0">
+                      <a:noFill/>
+                    </a:lnR>
+                    <a:lnT w="0">
+                      <a:noFill/>
+                    </a:lnT>
+                    <a:lnB w="9525">
+                      <a:solidFill>
+                        <a:srgbClr val="E2E2E2"/>
+                      </a:solidFill>
+                    </a:lnB>
+                  </a:tcPr>
+                </a:tc>
+                <a:tc>
+                  <a:txBody>
+                    <a:bodyPr/>
+                    <a:lstStyle/>
+                    <a:p>
+                      <a:r>
+                        <a:rPr sz="1300" b="0">
+                          <a:solidFill>
+                            <a:srgbClr val="5E5E5E"/>
+                          </a:solidFill>
+                          <a:latin typeface="Pretendard Medium"/>
+                        </a:rPr>
+                        <a:t>도착하는 대로</a:t>
+                      </a:r>
+                    </a:p>
+                  </a:txBody>
+                  <a:tcPr marL="101600" marR="101600" marT="101600" marB="101600" anchor="ctr">
+                    <a:solidFill>
+                      <a:srgbClr val="FFFFFF"/>
+                    </a:solidFill>
+                    <a:lnL w="0">
+                      <a:noFill/>
+                    </a:lnL>
+                    <a:lnR w="0">
+                      <a:noFill/>
+                    </a:lnR>
+                    <a:lnT w="0">
+                      <a:noFill/>
+                    </a:lnT>
+                    <a:lnB w="9525">
+                      <a:solidFill>
+                        <a:srgbClr val="E2E2E2"/>
+                      </a:solidFill>
+                    </a:lnB>
+                  </a:tcPr>
+                </a:tc>
+              </a:tr>
+              <a:tr h="635000">
+                <a:tc>
+                  <a:txBody>
+                    <a:bodyPr/>
+                    <a:lstStyle/>
+                    <a:p>
+                      <a:r>
+                        <a:rPr sz="1300" b="1">
+                          <a:solidFill>
+                            <a:srgbClr val="000000"/>
+                          </a:solidFill>
+                          <a:latin typeface="Pretendard"/>
+                        </a:rPr>
+                        <a:t>자원</a:t>
+                      </a:r>
+                    </a:p>
+                  </a:txBody>
+                  <a:tcPr marL="101600" marR="101600" marT="101600" marB="101600" anchor="ctr">
+                    <a:solidFill>
+                      <a:srgbClr val="FFFFFF"/>
+                    </a:solidFill>
+                    <a:lnL w="0">
+                      <a:noFill/>
+                    </a:lnL>
+                    <a:lnR w="0">
+                      <a:noFill/>
+                    </a:lnR>
+                    <a:lnT w="0">
+                      <a:noFill/>
+                    </a:lnT>
+                    <a:lnB w="9525">
+                      <a:solidFill>
+                        <a:srgbClr val="E2E2E2"/>
+                      </a:solidFill>
+                    </a:lnB>
+                  </a:tcPr>
+                </a:tc>
+                <a:tc>
+                  <a:txBody>
+                    <a:bodyPr/>
+                    <a:lstStyle/>
+                    <a:p>
+                      <a:r>
+                        <a:rPr sz="1300" b="0">
+                          <a:solidFill>
+                            <a:srgbClr val="5E5E5E"/>
+                          </a:solidFill>
+                          <a:latin typeface="Pretendard Medium"/>
+                        </a:rPr>
+                        <a:t>시간·계산량 큼</a:t>
+                      </a:r>
+                    </a:p>
+                  </a:txBody>
+                  <a:tcPr marL="101600" marR="101600" marT="101600" marB="101600" anchor="ctr">
+                    <a:solidFill>
+                      <a:srgbClr val="FFFFFF"/>
+                    </a:solidFill>
+                    <a:lnL w="0">
+                      <a:noFill/>
+                    </a:lnL>
+                    <a:lnR w="0">
+                      <a:noFill/>
+                    </a:lnR>
+                    <a:lnT w="0">
+                      <a:noFill/>
+                    </a:lnT>
+                    <a:lnB w="9525">
+                      <a:solidFill>
+                        <a:srgbClr val="E2E2E2"/>
+                      </a:solidFill>
+                    </a:lnB>
+                  </a:tcPr>
+                </a:tc>
+                <a:tc>
+                  <a:txBody>
+                    <a:bodyPr/>
+                    <a:lstStyle/>
+                    <a:p>
+                      <a:r>
+                        <a:rPr sz="1300" b="0">
+                          <a:solidFill>
+                            <a:srgbClr val="5E5E5E"/>
+                          </a:solidFill>
+                          <a:latin typeface="Pretendard Medium"/>
+                        </a:rPr>
+                        <a:t>적은 메모리</a:t>
+                      </a:r>
+                    </a:p>
+                  </a:txBody>
+                  <a:tcPr marL="101600" marR="101600" marT="101600" marB="101600" anchor="ctr">
+                    <a:solidFill>
+                      <a:srgbClr val="FFFFFF"/>
+                    </a:solidFill>
+                    <a:lnL w="0">
+                      <a:noFill/>
+                    </a:lnL>
+                    <a:lnR w="0">
+                      <a:noFill/>
+                    </a:lnR>
+                    <a:lnT w="0">
+                      <a:noFill/>
+                    </a:lnT>
+                    <a:lnB w="9525">
+                      <a:solidFill>
+                        <a:srgbClr val="E2E2E2"/>
+                      </a:solidFill>
+                    </a:lnB>
+                  </a:tcPr>
+                </a:tc>
+              </a:tr>
+            </a:tbl>
+          </a:graphicData>
+        </a:graphic>
+      </p:graphicFrame>
       <p:sp>
         <p:nvSpPr>
           <p:cNvPr id="25" name="Slide Number Placeholder 0"/>
@@ -5869,7 +6452,7 @@
             <a:pPr algn="r"/>
             <a:fld id="{F7021451-1387-4CA6-816F-3879F97B5CBC}" type="slidenum">
               <a:rPr b="0" lang="en-US"/>
-              <a:t>1009</a:t>
+              <a:t>1008</a:t>
             </a:fld>
             <a:endParaRPr lang="en-US"/>
           </a:p>
@@ -5895,12 +6478,12 @@
       <p:grpSpPr/>
       <p:sp>
         <p:nvSpPr>
-          <p:cNvPr id="2" name="Text Placeholder 1"/>
-          <p:cNvSpPr>
-            <a:spLocks noGrp="1"/>
-          </p:cNvSpPr>
-          <p:nvPr>
-            <p:ph type="body" idx="100"/>
+          <p:cNvPr id="2" name="Title 1"/>
+          <p:cNvSpPr>
+            <a:spLocks noGrp="1"/>
+          </p:cNvSpPr>
+          <p:nvPr>
+            <p:ph type="title" idx="100"/>
           </p:nvPr>
         </p:nvSpPr>
         <p:spPr/>
@@ -5909,19 +6492,19 @@
           <a:lstStyle/>
           <a:p>
             <a:r>
-              <a:t>03</a:t>
-            </a:r>
-          </a:p>
-        </p:txBody>
-      </p:sp>
-      <p:sp>
-        <p:nvSpPr>
-          <p:cNvPr id="3" name="Title 2"/>
-          <p:cNvSpPr>
-            <a:spLocks noGrp="1"/>
-          </p:cNvSpPr>
-          <p:nvPr>
-            <p:ph type="title" idx="101"/>
+              <a:t>2.5 사례 기반 학습과 모델 기반 학습</a:t>
+            </a:r>
+          </a:p>
+        </p:txBody>
+      </p:sp>
+      <p:sp>
+        <p:nvSpPr>
+          <p:cNvPr id="3" name="Text Placeholder 2"/>
+          <p:cNvSpPr>
+            <a:spLocks noGrp="1"/>
+          </p:cNvSpPr>
+          <p:nvPr>
+            <p:ph type="body" idx="101"/>
           </p:nvPr>
         </p:nvSpPr>
         <p:spPr/>
@@ -5930,7 +6513,7 @@
           <a:lstStyle/>
           <a:p>
             <a:r>
-              <a:t>주요 도전 과제</a:t>
+              <a:t>2. 머신러닝 시스템의 종류</a:t>
             </a:r>
           </a:p>
         </p:txBody>
@@ -5950,58 +6533,234 @@
           <a:bodyPr/>
           <a:lstStyle/>
           <a:p>
-            <a:pPr>
-              <a:spcAft>
-                <a:spcPts val="1000"/>
-              </a:spcAft>
-            </a:pPr>
+            <a:pPr/>
+            <a:r>
+              <a:t>사례 기반: 샘플을 기억</a:t>
+            </a:r>
+          </a:p>
+          <a:p>
+            <a:pPr/>
+            <a:r>
+              <a:t>유사도를 측정해 일반화</a:t>
+            </a:r>
+          </a:p>
+          <a:p>
+            <a:pPr/>
+            <a:r>
+              <a:t>모델 기반: 모델을 만들어 예측</a:t>
+            </a:r>
+          </a:p>
+          <a:p>
+            <a:pPr/>
+            <a:r>
+              <a:t>비용 함수를 최소화</a:t>
+            </a:r>
+          </a:p>
+          <a:p>
+            <a:pPr/>
+            <a:r>
+              <a:t>교재 예: 삶의 만족도</a:t>
+            </a:r>
+          </a:p>
+        </p:txBody>
+      </p:sp>
+      <p:sp>
+        <p:nvSpPr>
+          <p:cNvPr id="5" name="Text Placeholder 4"/>
+          <p:cNvSpPr>
+            <a:spLocks noGrp="1"/>
+          </p:cNvSpPr>
+          <p:nvPr>
+            <p:ph type="body" idx="103"/>
+          </p:nvPr>
+        </p:nvSpPr>
+        <p:spPr/>
+        <p:txBody>
+          <a:bodyPr/>
+          <a:lstStyle/>
+          <a:p>
+            <a:r>
+              <a:rPr b="1"/>
+              <a:t>import</a:t>
+            </a:r>
+            <a:r>
+              <a:t> pandas </a:t>
+            </a:r>
+            <a:r>
+              <a:rPr b="1"/>
+              <a:t>as</a:t>
+            </a:r>
+            <a:r>
+              <a:t> pd</a:t>
+            </a:r>
+          </a:p>
+          <a:p>
+            <a:r>
+              <a:rPr b="1"/>
+              <a:t>from</a:t>
+            </a:r>
+            <a:r>
+              <a:t> sklearn.linear_model </a:t>
+            </a:r>
+            <a:r>
+              <a:rPr b="1"/>
+              <a:t>import</a:t>
+            </a:r>
+            <a:r>
+              <a:t> LinearRegression</a:t>
+            </a:r>
+          </a:p>
+          <a:p>
+            <a:r>
+              <a:rPr b="1"/>
+              <a:t>from</a:t>
+            </a:r>
+            <a:r>
+              <a:t> sklearn.neighbors </a:t>
+            </a:r>
+            <a:r>
+              <a:rPr b="1"/>
+              <a:t>import</a:t>
+            </a:r>
+            <a:r>
+              <a:t> KNeighborsRegressor</a:t>
+            </a:r>
+          </a:p>
+          <a:p/>
+          <a:p>
+            <a:r>
+              <a:t>lifesat = pd.read_csv("lifesat.csv")</a:t>
+            </a:r>
+          </a:p>
+          <a:p>
+            <a:r>
+              <a:t>X = lifesat[["GDP per capita (USD)"]].values</a:t>
+            </a:r>
+          </a:p>
+          <a:p>
+            <a:r>
+              <a:t>y = lifesat[["Life satisfaction"]].values</a:t>
+            </a:r>
+          </a:p>
+          <a:p/>
+          <a:p>
+            <a:r>
+              <a:t>model = LinearRegression()           </a:t>
+            </a:r>
             <a:r>
               <a:rPr>
                 <a:solidFill>
+                  <a:srgbClr val="5E5E5E"/>
+                </a:solidFill>
+              </a:rPr>
+              <a:t># 모델 기반</a:t>
+            </a:r>
+          </a:p>
+          <a:p>
+            <a:r>
+              <a:t>model.fit(X, y)</a:t>
+            </a:r>
+          </a:p>
+          <a:p>
+            <a:r>
+              <a:rPr b="1"/>
+              <a:t>print</a:t>
+            </a:r>
+            <a:r>
+              <a:t>(model.predict([[37_655.2]]))   </a:t>
+            </a:r>
+            <a:r>
+              <a:rPr>
+                <a:solidFill>
+                  <a:srgbClr val="5E5E5E"/>
+                </a:solidFill>
+              </a:rPr>
+              <a:t># (결과) [[6.30]]</a:t>
+            </a:r>
+          </a:p>
+          <a:p/>
+          <a:p>
+            <a:r>
+              <a:t>model = KNeighborsRegressor(n_neighbors=3)   </a:t>
+            </a:r>
+            <a:r>
+              <a:rPr>
+                <a:solidFill>
+                  <a:srgbClr val="5E5E5E"/>
+                </a:solidFill>
+              </a:rPr>
+              <a:t># 사례 기반</a:t>
+            </a:r>
+          </a:p>
+          <a:p>
+            <a:r>
+              <a:t>model.fit(X, y)</a:t>
+            </a:r>
+          </a:p>
+          <a:p>
+            <a:r>
+              <a:rPr b="1"/>
+              <a:t>print</a:t>
+            </a:r>
+            <a:r>
+              <a:t>(model.predict([[37_655.2]]))   </a:t>
+            </a:r>
+            <a:r>
+              <a:rPr>
+                <a:solidFill>
+                  <a:srgbClr val="5E5E5E"/>
+                </a:solidFill>
+              </a:rPr>
+              <a:t># (결과) [[6.33]]</a:t>
+            </a:r>
+          </a:p>
+        </p:txBody>
+      </p:sp>
+      <p:sp>
+        <p:nvSpPr>
+          <p:cNvPr id="25" name="Slide Number Placeholder 0"/>
+          <p:cNvSpPr>
+            <a:spLocks noGrp="1"/>
+          </p:cNvSpPr>
+          <p:nvPr>
+            <p:ph type="sldNum" sz="quarter" idx="4294967295"/>
+          </p:nvPr>
+        </p:nvSpPr>
+        <p:spPr>
+          <a:xfrm>
+            <a:off x="10591495" y="6355080"/>
+            <a:ext cx="914400" cy="274320"/>
+          </a:xfrm>
+          <a:prstGeom prst="rect">
+            <a:avLst/>
+          </a:prstGeom>
+          <a:extLst>
+            <a:ext uri="{C572A759-6A51-4108-AA02-DFA0A04FC94B}">
+              <ma14:wrappingTextBoxFlag xmlns:ma14="http://schemas.microsoft.com/office/mac/drawingml/2011/main" val="0"/>
+            </a:ext>
+          </a:extLst>
+        </p:spPr>
+        <p:txBody>
+          <a:bodyPr/>
+          <a:lstStyle>
+            <a:lvl1pPr>
+              <a:defRPr sz="1000">
+                <a:solidFill>
                   <a:srgbClr val="AFAFAF"/>
                 </a:solidFill>
-              </a:rPr>
-              <a:t>3.1  </a:t>
-            </a:r>
-            <a:r>
-              <a:t>나쁜 데이터의 네 가지</a:t>
-            </a:r>
-          </a:p>
-          <a:p>
-            <a:pPr>
-              <a:spcAft>
-                <a:spcPts val="1000"/>
-              </a:spcAft>
-            </a:pPr>
-            <a:r>
-              <a:rPr>
-                <a:solidFill>
-                  <a:srgbClr val="AFAFAF"/>
-                </a:solidFill>
-              </a:rPr>
-              <a:t>3.2  </a:t>
-            </a:r>
-            <a:r>
-              <a:t>과대적합과 과소적합</a:t>
-            </a:r>
-          </a:p>
-          <a:p>
-            <a:pPr>
-              <a:spcAft>
-                <a:spcPts val="1000"/>
-              </a:spcAft>
-            </a:pPr>
-            <a:r>
-              <a:rPr>
-                <a:solidFill>
-                  <a:srgbClr val="AFAFAF"/>
-                </a:solidFill>
-              </a:rPr>
-              <a:t>3.3  </a:t>
-            </a:r>
-            <a:r>
-              <a:t>규제와 하이퍼파라미터</a:t>
-            </a:r>
+                <a:latin typeface="Pretendard Medium"/>
+                <a:ea typeface="Pretendard Medium"/>
+                <a:cs typeface="Pretendard Medium"/>
+              </a:defRPr>
+            </a:lvl1pPr>
+          </a:lstStyle>
+          <a:p>
+            <a:pPr algn="r"/>
+            <a:fld id="{F7021451-1387-4CA6-816F-3879F97B5CBC}" type="slidenum">
+              <a:rPr b="0" lang="en-US"/>
+              <a:t>1009</a:t>
+            </a:fld>
+            <a:endParaRPr lang="en-US"/>
           </a:p>
         </p:txBody>
       </p:sp>
@@ -6025,12 +6784,12 @@
       <p:grpSpPr/>
       <p:sp>
         <p:nvSpPr>
-          <p:cNvPr id="2" name="Title 1"/>
-          <p:cNvSpPr>
-            <a:spLocks noGrp="1"/>
-          </p:cNvSpPr>
-          <p:nvPr>
-            <p:ph type="title" idx="100"/>
+          <p:cNvPr id="2" name="Text Placeholder 1"/>
+          <p:cNvSpPr>
+            <a:spLocks noGrp="1"/>
+          </p:cNvSpPr>
+          <p:nvPr>
+            <p:ph type="body" idx="100"/>
           </p:nvPr>
         </p:nvSpPr>
         <p:spPr/>
@@ -6039,19 +6798,19 @@
           <a:lstStyle/>
           <a:p>
             <a:r>
-              <a:t>3.1 나쁜 데이터의 네 가지</a:t>
-            </a:r>
-          </a:p>
-        </p:txBody>
-      </p:sp>
-      <p:sp>
-        <p:nvSpPr>
-          <p:cNvPr id="3" name="Text Placeholder 2"/>
-          <p:cNvSpPr>
-            <a:spLocks noGrp="1"/>
-          </p:cNvSpPr>
-          <p:nvPr>
-            <p:ph type="body" idx="101"/>
+              <a:t>03</a:t>
+            </a:r>
+          </a:p>
+        </p:txBody>
+      </p:sp>
+      <p:sp>
+        <p:nvSpPr>
+          <p:cNvPr id="3" name="Title 2"/>
+          <p:cNvSpPr>
+            <a:spLocks noGrp="1"/>
+          </p:cNvSpPr>
+          <p:nvPr>
+            <p:ph type="title" idx="101"/>
           </p:nvPr>
         </p:nvSpPr>
         <p:spPr/>
@@ -6060,7 +6819,7 @@
           <a:lstStyle/>
           <a:p>
             <a:r>
-              <a:t>3. 주요 도전 과제</a:t>
+              <a:t>머신러닝의 주요 도전 과제</a:t>
             </a:r>
           </a:p>
         </p:txBody>
@@ -6080,82 +6839,76 @@
           <a:bodyPr/>
           <a:lstStyle/>
           <a:p>
-            <a:pPr/>
-            <a:r>
-              <a:t>양 부족 — 문제가 복잡할수록 필요한 데이터 증가</a:t>
-            </a:r>
-          </a:p>
-          <a:p>
-            <a:pPr/>
-            <a:r>
-              <a:t>대표성 없음 — 1936년 미국 대선 여론조사의 표본 편향</a:t>
-            </a:r>
-          </a:p>
-          <a:p>
-            <a:pPr lvl="1"/>
-            <a:r>
-              <a:t>샘플링 잡음은 양의 문제, 샘플링 편향은 방법의 문제</a:t>
-            </a:r>
-          </a:p>
-          <a:p>
-            <a:pPr/>
-            <a:r>
-              <a:t>품질 낮음 — 오류·이상치·결측의 정제</a:t>
-            </a:r>
-          </a:p>
-          <a:p>
-            <a:pPr/>
-            <a:r>
-              <a:t>관련 없는 특성 — 특성 공학으로 대응</a:t>
-            </a:r>
-          </a:p>
-        </p:txBody>
-      </p:sp>
-      <p:sp>
-        <p:nvSpPr>
-          <p:cNvPr id="25" name="Slide Number Placeholder 0"/>
-          <p:cNvSpPr>
-            <a:spLocks noGrp="1"/>
-          </p:cNvSpPr>
-          <p:nvPr>
-            <p:ph type="sldNum" sz="quarter" idx="4294967295"/>
-          </p:nvPr>
-        </p:nvSpPr>
-        <p:spPr>
-          <a:xfrm>
-            <a:off x="10591495" y="6355080"/>
-            <a:ext cx="914400" cy="274320"/>
-          </a:xfrm>
-          <a:prstGeom prst="rect">
-            <a:avLst/>
-          </a:prstGeom>
-          <a:extLst>
-            <a:ext uri="{C572A759-6A51-4108-AA02-DFA0A04FC94B}">
-              <ma14:wrappingTextBoxFlag xmlns:ma14="http://schemas.microsoft.com/office/mac/drawingml/2011/main" val="0"/>
-            </a:ext>
-          </a:extLst>
-        </p:spPr>
-        <p:txBody>
-          <a:bodyPr/>
-          <a:lstStyle>
-            <a:lvl1pPr>
-              <a:defRPr sz="1000">
+            <a:pPr>
+              <a:spcAft>
+                <a:spcPts val="1000"/>
+              </a:spcAft>
+            </a:pPr>
+            <a:r>
+              <a:rPr>
                 <a:solidFill>
                   <a:srgbClr val="AFAFAF"/>
                 </a:solidFill>
-                <a:latin typeface="Pretendard Medium"/>
-                <a:ea typeface="Pretendard Medium"/>
-                <a:cs typeface="Pretendard Medium"/>
-              </a:defRPr>
-            </a:lvl1pPr>
-          </a:lstStyle>
-          <a:p>
-            <a:pPr algn="r"/>
-            <a:fld id="{F7021451-1387-4CA6-816F-3879F97B5CBC}" type="slidenum">
-              <a:rPr b="0" lang="en-US"/>
-              <a:t>1004</a:t>
-            </a:fld>
-            <a:endParaRPr lang="en-US"/>
+              </a:rPr>
+              <a:t>3.1  </a:t>
+            </a:r>
+            <a:r>
+              <a:t>나쁜 데이터 — 양과 대표성</a:t>
+            </a:r>
+          </a:p>
+          <a:p>
+            <a:pPr>
+              <a:spcAft>
+                <a:spcPts val="1000"/>
+              </a:spcAft>
+            </a:pPr>
+            <a:r>
+              <a:rPr>
+                <a:solidFill>
+                  <a:srgbClr val="AFAFAF"/>
+                </a:solidFill>
+              </a:rPr>
+              <a:t>3.2  </a:t>
+            </a:r>
+            <a:r>
+              <a:t>나쁜 데이터 — 품질과 특성</a:t>
+            </a:r>
+          </a:p>
+          <a:p>
+            <a:pPr>
+              <a:spcAft>
+                <a:spcPts val="1000"/>
+              </a:spcAft>
+            </a:pPr>
+            <a:r>
+              <a:rPr>
+                <a:solidFill>
+                  <a:srgbClr val="AFAFAF"/>
+                </a:solidFill>
+              </a:rPr>
+              <a:t>3.3  </a:t>
+            </a:r>
+            <a:r>
+              <a:t>훈련 데이터 과대적합</a:t>
+            </a:r>
+          </a:p>
+          <a:p>
+            <a:pPr>
+              <a:spcAft>
+                <a:spcPts val="1000"/>
+              </a:spcAft>
+            </a:pPr>
+            <a:r>
+              <a:rPr>
+                <a:solidFill>
+                  <a:srgbClr val="AFAFAF"/>
+                </a:solidFill>
+              </a:rPr>
+              <a:t>3.4  </a:t>
+            </a:r>
+            <a:r>
+              <a:t>훈련 데이터 과소적합</a:t>
+            </a:r>
           </a:p>
         </p:txBody>
       </p:sp>
@@ -6193,7 +6946,7 @@
           <a:lstStyle/>
           <a:p>
             <a:r>
-              <a:t>3.2 과대적합과 과소적합</a:t>
+              <a:t>3.1 나쁜 데이터 — 양과 대표성</a:t>
             </a:r>
           </a:p>
         </p:txBody>
@@ -6214,7 +6967,7 @@
           <a:lstStyle/>
           <a:p>
             <a:r>
-              <a:t>3. 주요 도전 과제</a:t>
+              <a:t>3. 머신러닝의 주요 도전 과제</a:t>
             </a:r>
           </a:p>
         </p:txBody>
@@ -6236,25 +6989,360 @@
           <a:p>
             <a:pPr/>
             <a:r>
-              <a:t>너무 단순 — 과소적합</a:t>
+              <a:t>문제가 될 수 있는 것은 나쁜 데이터와 나쁜 모델</a:t>
             </a:r>
           </a:p>
           <a:p>
             <a:pPr/>
             <a:r>
-              <a:t>너무 복잡 — 과대적합</a:t>
+              <a:rPr b="1">
+                <a:latin typeface="Pretendard"/>
+              </a:rPr>
+              <a:t>충분하지 않은 양</a:t>
+            </a:r>
+            <a:r>
+              <a:t> — 간단한 문제도 수천 개</a:t>
             </a:r>
           </a:p>
           <a:p>
             <a:pPr/>
             <a:r>
-              <a:t>잡음까지 외운 결과</a:t>
-            </a:r>
-          </a:p>
+              <a:rPr b="1">
+                <a:latin typeface="Pretendard"/>
+              </a:rPr>
+              <a:t>대표성 없는 훈련 데이터</a:t>
+            </a:r>
+          </a:p>
+          <a:p>
+            <a:pPr lvl="1"/>
+            <a:r>
+              <a:t>샘플링 잡음 — 샘플이 작아 생기는 우연</a:t>
+            </a:r>
+          </a:p>
+          <a:p>
+            <a:pPr lvl="1"/>
+            <a:r>
+              <a:t>샘플링 편향 — 추출 방법이 잘못된 경우</a:t>
+            </a:r>
+          </a:p>
+        </p:txBody>
+      </p:sp>
+      <p:sp>
+        <p:nvSpPr>
+          <p:cNvPr id="25" name="Slide Number Placeholder 0"/>
+          <p:cNvSpPr>
+            <a:spLocks noGrp="1"/>
+          </p:cNvSpPr>
+          <p:nvPr>
+            <p:ph type="sldNum" sz="quarter" idx="4294967295"/>
+          </p:nvPr>
+        </p:nvSpPr>
+        <p:spPr>
+          <a:xfrm>
+            <a:off x="10591495" y="6355080"/>
+            <a:ext cx="914400" cy="274320"/>
+          </a:xfrm>
+          <a:prstGeom prst="rect">
+            <a:avLst/>
+          </a:prstGeom>
+          <a:extLst>
+            <a:ext uri="{C572A759-6A51-4108-AA02-DFA0A04FC94B}">
+              <ma14:wrappingTextBoxFlag xmlns:ma14="http://schemas.microsoft.com/office/mac/drawingml/2011/main" val="0"/>
+            </a:ext>
+          </a:extLst>
+        </p:spPr>
+        <p:txBody>
+          <a:bodyPr/>
+          <a:lstStyle>
+            <a:lvl1pPr>
+              <a:defRPr sz="1000">
+                <a:solidFill>
+                  <a:srgbClr val="AFAFAF"/>
+                </a:solidFill>
+                <a:latin typeface="Pretendard Medium"/>
+                <a:ea typeface="Pretendard Medium"/>
+                <a:cs typeface="Pretendard Medium"/>
+              </a:defRPr>
+            </a:lvl1pPr>
+          </a:lstStyle>
+          <a:p>
+            <a:pPr algn="r"/>
+            <a:fld id="{F7021451-1387-4CA6-816F-3879F97B5CBC}" type="slidenum">
+              <a:rPr b="0" lang="en-US"/>
+              <a:t>1004</a:t>
+            </a:fld>
+            <a:endParaRPr lang="en-US"/>
+          </a:p>
+        </p:txBody>
+      </p:sp>
+    </p:spTree>
+  </p:cSld>
+  <p:clrMapOvr>
+    <a:masterClrMapping/>
+  </p:clrMapOvr>
+</p:sld>
+</file>
+
+<file path=ppt/slides/slide16.xml><?xml version="1.0" encoding="utf-8"?>
+<p:sld xmlns:a="http://schemas.openxmlformats.org/drawingml/2006/main" xmlns:p="http://schemas.openxmlformats.org/presentationml/2006/main" xmlns:r="http://schemas.openxmlformats.org/officeDocument/2006/relationships">
+  <p:cSld>
+    <p:spTree>
+      <p:nvGrpSpPr>
+        <p:cNvPr id="1" name=""/>
+        <p:cNvGrpSpPr/>
+        <p:nvPr/>
+      </p:nvGrpSpPr>
+      <p:grpSpPr/>
+      <p:sp>
+        <p:nvSpPr>
+          <p:cNvPr id="2" name="Title 1"/>
+          <p:cNvSpPr>
+            <a:spLocks noGrp="1"/>
+          </p:cNvSpPr>
+          <p:nvPr>
+            <p:ph type="title" idx="100"/>
+          </p:nvPr>
+        </p:nvSpPr>
+        <p:spPr/>
+        <p:txBody>
+          <a:bodyPr/>
+          <a:lstStyle/>
+          <a:p>
+            <a:r>
+              <a:t>3.2 나쁜 데이터 — 품질과 특성</a:t>
+            </a:r>
+          </a:p>
+        </p:txBody>
+      </p:sp>
+      <p:sp>
+        <p:nvSpPr>
+          <p:cNvPr id="3" name="Text Placeholder 2"/>
+          <p:cNvSpPr>
+            <a:spLocks noGrp="1"/>
+          </p:cNvSpPr>
+          <p:nvPr>
+            <p:ph type="body" idx="101"/>
+          </p:nvPr>
+        </p:nvSpPr>
+        <p:spPr/>
+        <p:txBody>
+          <a:bodyPr/>
+          <a:lstStyle/>
+          <a:p>
+            <a:r>
+              <a:t>3. 머신러닝의 주요 도전 과제</a:t>
+            </a:r>
+          </a:p>
+        </p:txBody>
+      </p:sp>
+      <p:sp>
+        <p:nvSpPr>
+          <p:cNvPr id="4" name="Text Placeholder 3"/>
+          <p:cNvSpPr>
+            <a:spLocks noGrp="1"/>
+          </p:cNvSpPr>
+          <p:nvPr>
+            <p:ph type="body" idx="102"/>
+          </p:nvPr>
+        </p:nvSpPr>
+        <p:spPr/>
+        <p:txBody>
+          <a:bodyPr/>
+          <a:lstStyle/>
           <a:p>
             <a:pPr/>
             <a:r>
-              <a:t>진단은 훈련·검증 오차의 격차</a:t>
+              <a:rPr b="1">
+                <a:latin typeface="Pretendard"/>
+              </a:rPr>
+              <a:t>낮은 품질의 데이터</a:t>
+            </a:r>
+            <a:r>
+              <a:t> — 오류·이상치·잡음의 정제</a:t>
+            </a:r>
+          </a:p>
+          <a:p>
+            <a:pPr lvl="1"/>
+            <a:r>
+              <a:t>이상치는 제거하거나 수정</a:t>
+            </a:r>
+          </a:p>
+          <a:p>
+            <a:pPr lvl="1"/>
+            <a:r>
+              <a:t>결측은 제외·대체·분리 학습 중 선택</a:t>
+            </a:r>
+          </a:p>
+          <a:p>
+            <a:pPr/>
+            <a:r>
+              <a:rPr b="1">
+                <a:latin typeface="Pretendard"/>
+              </a:rPr>
+              <a:t>관련없는 특성</a:t>
+            </a:r>
+            <a:r>
+              <a:t> — 특성 공학으로 대응</a:t>
+            </a:r>
+          </a:p>
+          <a:p>
+            <a:pPr lvl="1"/>
+            <a:r>
+              <a:t>특성 선택, 특성 추출, 새 데이터 수집</a:t>
+            </a:r>
+          </a:p>
+        </p:txBody>
+      </p:sp>
+      <p:sp>
+        <p:nvSpPr>
+          <p:cNvPr id="25" name="Slide Number Placeholder 0"/>
+          <p:cNvSpPr>
+            <a:spLocks noGrp="1"/>
+          </p:cNvSpPr>
+          <p:nvPr>
+            <p:ph type="sldNum" sz="quarter" idx="4294967295"/>
+          </p:nvPr>
+        </p:nvSpPr>
+        <p:spPr>
+          <a:xfrm>
+            <a:off x="10591495" y="6355080"/>
+            <a:ext cx="914400" cy="274320"/>
+          </a:xfrm>
+          <a:prstGeom prst="rect">
+            <a:avLst/>
+          </a:prstGeom>
+          <a:extLst>
+            <a:ext uri="{C572A759-6A51-4108-AA02-DFA0A04FC94B}">
+              <ma14:wrappingTextBoxFlag xmlns:ma14="http://schemas.microsoft.com/office/mac/drawingml/2011/main" val="0"/>
+            </a:ext>
+          </a:extLst>
+        </p:spPr>
+        <p:txBody>
+          <a:bodyPr/>
+          <a:lstStyle>
+            <a:lvl1pPr>
+              <a:defRPr sz="1000">
+                <a:solidFill>
+                  <a:srgbClr val="AFAFAF"/>
+                </a:solidFill>
+                <a:latin typeface="Pretendard Medium"/>
+                <a:ea typeface="Pretendard Medium"/>
+                <a:cs typeface="Pretendard Medium"/>
+              </a:defRPr>
+            </a:lvl1pPr>
+          </a:lstStyle>
+          <a:p>
+            <a:pPr algn="r"/>
+            <a:fld id="{F7021451-1387-4CA6-816F-3879F97B5CBC}" type="slidenum">
+              <a:rPr b="0" lang="en-US"/>
+              <a:t>1004</a:t>
+            </a:fld>
+            <a:endParaRPr lang="en-US"/>
+          </a:p>
+        </p:txBody>
+      </p:sp>
+    </p:spTree>
+  </p:cSld>
+  <p:clrMapOvr>
+    <a:masterClrMapping/>
+  </p:clrMapOvr>
+</p:sld>
+</file>
+
+<file path=ppt/slides/slide17.xml><?xml version="1.0" encoding="utf-8"?>
+<p:sld xmlns:a="http://schemas.openxmlformats.org/drawingml/2006/main" xmlns:p="http://schemas.openxmlformats.org/presentationml/2006/main" xmlns:r="http://schemas.openxmlformats.org/officeDocument/2006/relationships">
+  <p:cSld>
+    <p:spTree>
+      <p:nvGrpSpPr>
+        <p:cNvPr id="1" name=""/>
+        <p:cNvGrpSpPr/>
+        <p:nvPr/>
+      </p:nvGrpSpPr>
+      <p:grpSpPr/>
+      <p:sp>
+        <p:nvSpPr>
+          <p:cNvPr id="2" name="Title 1"/>
+          <p:cNvSpPr>
+            <a:spLocks noGrp="1"/>
+          </p:cNvSpPr>
+          <p:nvPr>
+            <p:ph type="title" idx="100"/>
+          </p:nvPr>
+        </p:nvSpPr>
+        <p:spPr/>
+        <p:txBody>
+          <a:bodyPr/>
+          <a:lstStyle/>
+          <a:p>
+            <a:r>
+              <a:t>3.3 훈련 데이터 과대적합</a:t>
+            </a:r>
+          </a:p>
+        </p:txBody>
+      </p:sp>
+      <p:sp>
+        <p:nvSpPr>
+          <p:cNvPr id="3" name="Text Placeholder 2"/>
+          <p:cNvSpPr>
+            <a:spLocks noGrp="1"/>
+          </p:cNvSpPr>
+          <p:nvPr>
+            <p:ph type="body" idx="101"/>
+          </p:nvPr>
+        </p:nvSpPr>
+        <p:spPr/>
+        <p:txBody>
+          <a:bodyPr/>
+          <a:lstStyle/>
+          <a:p>
+            <a:r>
+              <a:t>3. 머신러닝의 주요 도전 과제</a:t>
+            </a:r>
+          </a:p>
+        </p:txBody>
+      </p:sp>
+      <p:sp>
+        <p:nvSpPr>
+          <p:cNvPr id="4" name="Text Placeholder 3"/>
+          <p:cNvSpPr>
+            <a:spLocks noGrp="1"/>
+          </p:cNvSpPr>
+          <p:nvPr>
+            <p:ph type="body" idx="102"/>
+          </p:nvPr>
+        </p:nvSpPr>
+        <p:spPr/>
+        <p:txBody>
+          <a:bodyPr/>
+          <a:lstStyle/>
+          <a:p>
+            <a:pPr/>
+            <a:r>
+              <a:t>훈련에는 잘 맞고</a:t>
+            </a:r>
+          </a:p>
+          <a:p>
+            <a:pPr/>
+            <a:r>
+              <a:t>새 데이터에는 안 맞음</a:t>
+            </a:r>
+          </a:p>
+          <a:p>
+            <a:pPr/>
+            <a:r>
+              <a:t>잡음까지 학습한 결과</a:t>
+            </a:r>
+          </a:p>
+          <a:p>
+            <a:pPr/>
+            <a:r>
+              <a:t>규제로 자유도를 제한</a:t>
+            </a:r>
+          </a:p>
+          <a:p>
+            <a:pPr/>
+            <a:r>
+              <a:t>규제 양은 하이퍼파라미터</a:t>
             </a:r>
           </a:p>
         </p:txBody>
@@ -6275,7 +7363,7 @@
           <a:lstStyle/>
           <a:p>
             <a:r>
-              <a:t>그림 1. 모델 복잡도에 따른 과소적합과 과대적합 (합성 데이터)</a:t>
+              <a:t>그림 1. 모델 복잡도에 따른 과소적합과 과대적합</a:t>
             </a:r>
           </a:p>
         </p:txBody>
@@ -6360,7 +7448,7 @@
 </p:sld>
 </file>
 
-<file path=ppt/slides/slide16.xml><?xml version="1.0" encoding="utf-8"?>
+<file path=ppt/slides/slide18.xml><?xml version="1.0" encoding="utf-8"?>
 <p:sld xmlns:a="http://schemas.openxmlformats.org/drawingml/2006/main" xmlns:p="http://schemas.openxmlformats.org/presentationml/2006/main" xmlns:r="http://schemas.openxmlformats.org/officeDocument/2006/relationships">
   <p:cSld>
     <p:spTree>
@@ -6386,7 +7474,7 @@
           <a:lstStyle/>
           <a:p>
             <a:r>
-              <a:t>3.3 규제와 하이퍼파라미터</a:t>
+              <a:t>3.4 훈련 데이터 과소적합</a:t>
             </a:r>
           </a:p>
         </p:txBody>
@@ -6407,7 +7495,7 @@
           <a:lstStyle/>
           <a:p>
             <a:r>
-              <a:t>3. 주요 도전 과제</a:t>
+              <a:t>3. 머신러닝의 주요 도전 과제</a:t>
             </a:r>
           </a:p>
         </p:txBody>
@@ -6429,29 +7517,660 @@
           <a:p>
             <a:pPr/>
             <a:r>
-              <a:t>규제: 모델의 자유도에 제약을 걸어 과대적합을 줄임</a:t>
+              <a:t>모델이 너무 단순함</a:t>
             </a:r>
           </a:p>
           <a:p>
             <a:pPr/>
             <a:r>
-              <a:t>규제 강도는 훈련으로 정해지지 않음 — 하이퍼파라미터</a:t>
+              <a:t>구조를 학습하지 못함</a:t>
             </a:r>
           </a:p>
           <a:p>
             <a:pPr/>
             <a:r>
-              <a:t>모델 파라미터는 훈련으로 정해지는 값</a:t>
+              <a:t>대응은 과대적합의 반대</a:t>
             </a:r>
           </a:p>
           <a:p>
             <a:pPr/>
             <a:r>
-              <a:t>과소적합의 처방은 반대 — 더 복잡한 모델, 더 나은 특성</a:t>
-            </a:r>
-          </a:p>
-        </p:txBody>
-      </p:sp>
+              <a:t>강력한 모델, 나은 특성</a:t>
+            </a:r>
+          </a:p>
+          <a:p>
+            <a:pPr/>
+            <a:r>
+              <a:t>규제를 줄이기</a:t>
+            </a:r>
+          </a:p>
+        </p:txBody>
+      </p:sp>
+      <p:sp>
+        <p:nvSpPr>
+          <p:cNvPr id="5" name="Text Placeholder 4"/>
+          <p:cNvSpPr>
+            <a:spLocks noGrp="1"/>
+          </p:cNvSpPr>
+          <p:nvPr>
+            <p:ph type="body" idx="103"/>
+          </p:nvPr>
+        </p:nvSpPr>
+        <p:spPr/>
+        <p:txBody>
+          <a:bodyPr/>
+          <a:lstStyle/>
+          <a:p>
+            <a:r>
+              <a:t>표 5. 훈련·검증 성능으로 보는 진단</a:t>
+            </a:r>
+          </a:p>
+        </p:txBody>
+      </p:sp>
+      <p:graphicFrame>
+        <p:nvGraphicFramePr>
+          <p:cNvPr id="6" name="Table Placeholder 5"/>
+          <p:cNvGraphicFramePr>
+            <a:graphicFrameLocks noGrp="1"/>
+          </p:cNvGraphicFramePr>
+          <p:nvPr>
+            <p:ph type="tbl" idx="104"/>
+          </p:nvPr>
+        </p:nvGraphicFramePr>
+        <p:xfrm>
+          <a:off x="4937760" y="1828800"/>
+          <a:ext cx="6565392" cy="2311400"/>
+        </p:xfrm>
+        <a:graphic>
+          <a:graphicData uri="http://schemas.openxmlformats.org/drawingml/2006/table">
+            <a:tbl>
+              <a:tblPr firstRow="0" bandRow="0" firstCol="0" lastRow="0" lastCol="0" bandCol="0"/>
+              <a:tblGrid>
+                <a:gridCol w="1641348"/>
+                <a:gridCol w="1641348"/>
+                <a:gridCol w="1641348"/>
+                <a:gridCol w="1641348"/>
+              </a:tblGrid>
+              <a:tr h="406400">
+                <a:tc>
+                  <a:txBody>
+                    <a:bodyPr/>
+                    <a:lstStyle/>
+                    <a:p>
+                      <a:r>
+                        <a:rPr sz="1300" b="0">
+                          <a:solidFill>
+                            <a:srgbClr val="FFFFFF"/>
+                          </a:solidFill>
+                          <a:latin typeface="Pretendard Medium"/>
+                        </a:rPr>
+                        <a:t>상태</a:t>
+                      </a:r>
+                    </a:p>
+                  </a:txBody>
+                  <a:tcPr marL="101600" marR="101600" marT="76200" marB="76200" anchor="ctr">
+                    <a:solidFill>
+                      <a:srgbClr val="000000"/>
+                    </a:solidFill>
+                    <a:lnL w="0">
+                      <a:noFill/>
+                    </a:lnL>
+                    <a:lnR w="0">
+                      <a:noFill/>
+                    </a:lnR>
+                    <a:lnT w="0">
+                      <a:noFill/>
+                    </a:lnT>
+                    <a:lnB w="0">
+                      <a:noFill/>
+                    </a:lnB>
+                  </a:tcPr>
+                </a:tc>
+                <a:tc>
+                  <a:txBody>
+                    <a:bodyPr/>
+                    <a:lstStyle/>
+                    <a:p>
+                      <a:r>
+                        <a:rPr sz="1300" b="0">
+                          <a:solidFill>
+                            <a:srgbClr val="FFFFFF"/>
+                          </a:solidFill>
+                          <a:latin typeface="Pretendard Medium"/>
+                        </a:rPr>
+                        <a:t>훈련</a:t>
+                      </a:r>
+                    </a:p>
+                  </a:txBody>
+                  <a:tcPr marL="101600" marR="101600" marT="76200" marB="76200" anchor="ctr">
+                    <a:solidFill>
+                      <a:srgbClr val="000000"/>
+                    </a:solidFill>
+                    <a:lnL w="0">
+                      <a:noFill/>
+                    </a:lnL>
+                    <a:lnR w="0">
+                      <a:noFill/>
+                    </a:lnR>
+                    <a:lnT w="0">
+                      <a:noFill/>
+                    </a:lnT>
+                    <a:lnB w="0">
+                      <a:noFill/>
+                    </a:lnB>
+                  </a:tcPr>
+                </a:tc>
+                <a:tc>
+                  <a:txBody>
+                    <a:bodyPr/>
+                    <a:lstStyle/>
+                    <a:p>
+                      <a:r>
+                        <a:rPr sz="1300" b="0">
+                          <a:solidFill>
+                            <a:srgbClr val="FFFFFF"/>
+                          </a:solidFill>
+                          <a:latin typeface="Pretendard Medium"/>
+                        </a:rPr>
+                        <a:t>검증</a:t>
+                      </a:r>
+                    </a:p>
+                  </a:txBody>
+                  <a:tcPr marL="101600" marR="101600" marT="76200" marB="76200" anchor="ctr">
+                    <a:solidFill>
+                      <a:srgbClr val="000000"/>
+                    </a:solidFill>
+                    <a:lnL w="0">
+                      <a:noFill/>
+                    </a:lnL>
+                    <a:lnR w="0">
+                      <a:noFill/>
+                    </a:lnR>
+                    <a:lnT w="0">
+                      <a:noFill/>
+                    </a:lnT>
+                    <a:lnB w="0">
+                      <a:noFill/>
+                    </a:lnB>
+                  </a:tcPr>
+                </a:tc>
+                <a:tc>
+                  <a:txBody>
+                    <a:bodyPr/>
+                    <a:lstStyle/>
+                    <a:p>
+                      <a:r>
+                        <a:rPr sz="1300" b="0">
+                          <a:solidFill>
+                            <a:srgbClr val="FFFFFF"/>
+                          </a:solidFill>
+                          <a:latin typeface="Pretendard Medium"/>
+                        </a:rPr>
+                        <a:t>대응</a:t>
+                      </a:r>
+                    </a:p>
+                  </a:txBody>
+                  <a:tcPr marL="101600" marR="101600" marT="76200" marB="76200" anchor="ctr">
+                    <a:solidFill>
+                      <a:srgbClr val="000000"/>
+                    </a:solidFill>
+                    <a:lnL w="0">
+                      <a:noFill/>
+                    </a:lnL>
+                    <a:lnR w="0">
+                      <a:noFill/>
+                    </a:lnR>
+                    <a:lnT w="0">
+                      <a:noFill/>
+                    </a:lnT>
+                    <a:lnB w="0">
+                      <a:noFill/>
+                    </a:lnB>
+                  </a:tcPr>
+                </a:tc>
+              </a:tr>
+              <a:tr h="635000">
+                <a:tc>
+                  <a:txBody>
+                    <a:bodyPr/>
+                    <a:lstStyle/>
+                    <a:p>
+                      <a:r>
+                        <a:rPr sz="1300" b="1">
+                          <a:solidFill>
+                            <a:srgbClr val="000000"/>
+                          </a:solidFill>
+                          <a:latin typeface="Pretendard"/>
+                        </a:rPr>
+                        <a:t>과소적합</a:t>
+                      </a:r>
+                    </a:p>
+                  </a:txBody>
+                  <a:tcPr marL="101600" marR="101600" marT="101600" marB="101600" anchor="ctr">
+                    <a:solidFill>
+                      <a:srgbClr val="FFFFFF"/>
+                    </a:solidFill>
+                    <a:lnL w="0">
+                      <a:noFill/>
+                    </a:lnL>
+                    <a:lnR w="0">
+                      <a:noFill/>
+                    </a:lnR>
+                    <a:lnT w="0">
+                      <a:noFill/>
+                    </a:lnT>
+                    <a:lnB w="9525">
+                      <a:solidFill>
+                        <a:srgbClr val="E2E2E2"/>
+                      </a:solidFill>
+                    </a:lnB>
+                  </a:tcPr>
+                </a:tc>
+                <a:tc>
+                  <a:txBody>
+                    <a:bodyPr/>
+                    <a:lstStyle/>
+                    <a:p>
+                      <a:r>
+                        <a:rPr sz="1300" b="0">
+                          <a:solidFill>
+                            <a:srgbClr val="5E5E5E"/>
+                          </a:solidFill>
+                          <a:latin typeface="Pretendard Medium"/>
+                        </a:rPr>
+                        <a:t>낮음</a:t>
+                      </a:r>
+                    </a:p>
+                  </a:txBody>
+                  <a:tcPr marL="101600" marR="101600" marT="101600" marB="101600" anchor="ctr">
+                    <a:solidFill>
+                      <a:srgbClr val="FFFFFF"/>
+                    </a:solidFill>
+                    <a:lnL w="0">
+                      <a:noFill/>
+                    </a:lnL>
+                    <a:lnR w="0">
+                      <a:noFill/>
+                    </a:lnR>
+                    <a:lnT w="0">
+                      <a:noFill/>
+                    </a:lnT>
+                    <a:lnB w="9525">
+                      <a:solidFill>
+                        <a:srgbClr val="E2E2E2"/>
+                      </a:solidFill>
+                    </a:lnB>
+                  </a:tcPr>
+                </a:tc>
+                <a:tc>
+                  <a:txBody>
+                    <a:bodyPr/>
+                    <a:lstStyle/>
+                    <a:p>
+                      <a:r>
+                        <a:rPr sz="1300" b="0">
+                          <a:solidFill>
+                            <a:srgbClr val="5E5E5E"/>
+                          </a:solidFill>
+                          <a:latin typeface="Pretendard Medium"/>
+                        </a:rPr>
+                        <a:t>낮음</a:t>
+                      </a:r>
+                    </a:p>
+                  </a:txBody>
+                  <a:tcPr marL="101600" marR="101600" marT="101600" marB="101600" anchor="ctr">
+                    <a:solidFill>
+                      <a:srgbClr val="FFFFFF"/>
+                    </a:solidFill>
+                    <a:lnL w="0">
+                      <a:noFill/>
+                    </a:lnL>
+                    <a:lnR w="0">
+                      <a:noFill/>
+                    </a:lnR>
+                    <a:lnT w="0">
+                      <a:noFill/>
+                    </a:lnT>
+                    <a:lnB w="9525">
+                      <a:solidFill>
+                        <a:srgbClr val="E2E2E2"/>
+                      </a:solidFill>
+                    </a:lnB>
+                  </a:tcPr>
+                </a:tc>
+                <a:tc>
+                  <a:txBody>
+                    <a:bodyPr/>
+                    <a:lstStyle/>
+                    <a:p>
+                      <a:r>
+                        <a:rPr sz="1300" b="0">
+                          <a:solidFill>
+                            <a:srgbClr val="5E5E5E"/>
+                          </a:solidFill>
+                          <a:latin typeface="Pretendard Medium"/>
+                        </a:rPr>
+                        <a:t>복잡한 모델, 특성 개선</a:t>
+                      </a:r>
+                    </a:p>
+                  </a:txBody>
+                  <a:tcPr marL="101600" marR="101600" marT="101600" marB="101600" anchor="ctr">
+                    <a:solidFill>
+                      <a:srgbClr val="FFFFFF"/>
+                    </a:solidFill>
+                    <a:lnL w="0">
+                      <a:noFill/>
+                    </a:lnL>
+                    <a:lnR w="0">
+                      <a:noFill/>
+                    </a:lnR>
+                    <a:lnT w="0">
+                      <a:noFill/>
+                    </a:lnT>
+                    <a:lnB w="9525">
+                      <a:solidFill>
+                        <a:srgbClr val="E2E2E2"/>
+                      </a:solidFill>
+                    </a:lnB>
+                  </a:tcPr>
+                </a:tc>
+              </a:tr>
+              <a:tr h="635000">
+                <a:tc>
+                  <a:txBody>
+                    <a:bodyPr/>
+                    <a:lstStyle/>
+                    <a:p>
+                      <a:r>
+                        <a:rPr sz="1300" b="1">
+                          <a:solidFill>
+                            <a:srgbClr val="000000"/>
+                          </a:solidFill>
+                          <a:latin typeface="Pretendard"/>
+                        </a:rPr>
+                        <a:t>적정</a:t>
+                      </a:r>
+                    </a:p>
+                  </a:txBody>
+                  <a:tcPr marL="101600" marR="101600" marT="101600" marB="101600" anchor="ctr">
+                    <a:solidFill>
+                      <a:srgbClr val="FFFFFF"/>
+                    </a:solidFill>
+                    <a:lnL w="0">
+                      <a:noFill/>
+                    </a:lnL>
+                    <a:lnR w="0">
+                      <a:noFill/>
+                    </a:lnR>
+                    <a:lnT w="0">
+                      <a:noFill/>
+                    </a:lnT>
+                    <a:lnB w="9525">
+                      <a:solidFill>
+                        <a:srgbClr val="E2E2E2"/>
+                      </a:solidFill>
+                    </a:lnB>
+                  </a:tcPr>
+                </a:tc>
+                <a:tc>
+                  <a:txBody>
+                    <a:bodyPr/>
+                    <a:lstStyle/>
+                    <a:p>
+                      <a:r>
+                        <a:rPr sz="1300" b="0">
+                          <a:solidFill>
+                            <a:srgbClr val="5E5E5E"/>
+                          </a:solidFill>
+                          <a:latin typeface="Pretendard Medium"/>
+                        </a:rPr>
+                        <a:t>높음</a:t>
+                      </a:r>
+                    </a:p>
+                  </a:txBody>
+                  <a:tcPr marL="101600" marR="101600" marT="101600" marB="101600" anchor="ctr">
+                    <a:solidFill>
+                      <a:srgbClr val="FFFFFF"/>
+                    </a:solidFill>
+                    <a:lnL w="0">
+                      <a:noFill/>
+                    </a:lnL>
+                    <a:lnR w="0">
+                      <a:noFill/>
+                    </a:lnR>
+                    <a:lnT w="0">
+                      <a:noFill/>
+                    </a:lnT>
+                    <a:lnB w="9525">
+                      <a:solidFill>
+                        <a:srgbClr val="E2E2E2"/>
+                      </a:solidFill>
+                    </a:lnB>
+                  </a:tcPr>
+                </a:tc>
+                <a:tc>
+                  <a:txBody>
+                    <a:bodyPr/>
+                    <a:lstStyle/>
+                    <a:p>
+                      <a:r>
+                        <a:rPr sz="1300" b="0">
+                          <a:solidFill>
+                            <a:srgbClr val="5E5E5E"/>
+                          </a:solidFill>
+                          <a:latin typeface="Pretendard Medium"/>
+                        </a:rPr>
+                        <a:t>높음</a:t>
+                      </a:r>
+                    </a:p>
+                  </a:txBody>
+                  <a:tcPr marL="101600" marR="101600" marT="101600" marB="101600" anchor="ctr">
+                    <a:solidFill>
+                      <a:srgbClr val="FFFFFF"/>
+                    </a:solidFill>
+                    <a:lnL w="0">
+                      <a:noFill/>
+                    </a:lnL>
+                    <a:lnR w="0">
+                      <a:noFill/>
+                    </a:lnR>
+                    <a:lnT w="0">
+                      <a:noFill/>
+                    </a:lnT>
+                    <a:lnB w="9525">
+                      <a:solidFill>
+                        <a:srgbClr val="E2E2E2"/>
+                      </a:solidFill>
+                    </a:lnB>
+                  </a:tcPr>
+                </a:tc>
+                <a:tc>
+                  <a:txBody>
+                    <a:bodyPr/>
+                    <a:lstStyle/>
+                    <a:p>
+                      <a:r>
+                        <a:rPr sz="1300" b="0">
+                          <a:solidFill>
+                            <a:srgbClr val="5E5E5E"/>
+                          </a:solidFill>
+                          <a:latin typeface="Pretendard Medium"/>
+                        </a:rPr>
+                        <a:t>최종 평가 진행</a:t>
+                      </a:r>
+                    </a:p>
+                  </a:txBody>
+                  <a:tcPr marL="101600" marR="101600" marT="101600" marB="101600" anchor="ctr">
+                    <a:solidFill>
+                      <a:srgbClr val="FFFFFF"/>
+                    </a:solidFill>
+                    <a:lnL w="0">
+                      <a:noFill/>
+                    </a:lnL>
+                    <a:lnR w="0">
+                      <a:noFill/>
+                    </a:lnR>
+                    <a:lnT w="0">
+                      <a:noFill/>
+                    </a:lnT>
+                    <a:lnB w="9525">
+                      <a:solidFill>
+                        <a:srgbClr val="E2E2E2"/>
+                      </a:solidFill>
+                    </a:lnB>
+                  </a:tcPr>
+                </a:tc>
+              </a:tr>
+              <a:tr h="635000">
+                <a:tc>
+                  <a:txBody>
+                    <a:bodyPr/>
+                    <a:lstStyle/>
+                    <a:p>
+                      <a:r>
+                        <a:rPr sz="1300" b="1">
+                          <a:solidFill>
+                            <a:srgbClr val="000000"/>
+                          </a:solidFill>
+                          <a:latin typeface="Pretendard"/>
+                        </a:rPr>
+                        <a:t>과대적합</a:t>
+                      </a:r>
+                    </a:p>
+                  </a:txBody>
+                  <a:tcPr marL="101600" marR="101600" marT="101600" marB="101600" anchor="ctr">
+                    <a:solidFill>
+                      <a:srgbClr val="FFFFFF"/>
+                    </a:solidFill>
+                    <a:lnL w="0">
+                      <a:noFill/>
+                    </a:lnL>
+                    <a:lnR w="0">
+                      <a:noFill/>
+                    </a:lnR>
+                    <a:lnT w="0">
+                      <a:noFill/>
+                    </a:lnT>
+                    <a:lnB w="9525">
+                      <a:solidFill>
+                        <a:srgbClr val="E2E2E2"/>
+                      </a:solidFill>
+                    </a:lnB>
+                  </a:tcPr>
+                </a:tc>
+                <a:tc>
+                  <a:txBody>
+                    <a:bodyPr/>
+                    <a:lstStyle/>
+                    <a:p>
+                      <a:r>
+                        <a:rPr sz="1300" b="0">
+                          <a:solidFill>
+                            <a:srgbClr val="5E5E5E"/>
+                          </a:solidFill>
+                          <a:latin typeface="Pretendard Medium"/>
+                        </a:rPr>
+                        <a:t>매우 높음</a:t>
+                      </a:r>
+                    </a:p>
+                  </a:txBody>
+                  <a:tcPr marL="101600" marR="101600" marT="101600" marB="101600" anchor="ctr">
+                    <a:solidFill>
+                      <a:srgbClr val="FFFFFF"/>
+                    </a:solidFill>
+                    <a:lnL w="0">
+                      <a:noFill/>
+                    </a:lnL>
+                    <a:lnR w="0">
+                      <a:noFill/>
+                    </a:lnR>
+                    <a:lnT w="0">
+                      <a:noFill/>
+                    </a:lnT>
+                    <a:lnB w="9525">
+                      <a:solidFill>
+                        <a:srgbClr val="E2E2E2"/>
+                      </a:solidFill>
+                    </a:lnB>
+                  </a:tcPr>
+                </a:tc>
+                <a:tc>
+                  <a:txBody>
+                    <a:bodyPr/>
+                    <a:lstStyle/>
+                    <a:p>
+                      <a:r>
+                        <a:rPr sz="1300" b="0">
+                          <a:solidFill>
+                            <a:srgbClr val="5E5E5E"/>
+                          </a:solidFill>
+                          <a:latin typeface="Pretendard Medium"/>
+                        </a:rPr>
+                        <a:t>낮음</a:t>
+                      </a:r>
+                    </a:p>
+                  </a:txBody>
+                  <a:tcPr marL="101600" marR="101600" marT="101600" marB="101600" anchor="ctr">
+                    <a:solidFill>
+                      <a:srgbClr val="FFFFFF"/>
+                    </a:solidFill>
+                    <a:lnL w="0">
+                      <a:noFill/>
+                    </a:lnL>
+                    <a:lnR w="0">
+                      <a:noFill/>
+                    </a:lnR>
+                    <a:lnT w="0">
+                      <a:noFill/>
+                    </a:lnT>
+                    <a:lnB w="9525">
+                      <a:solidFill>
+                        <a:srgbClr val="E2E2E2"/>
+                      </a:solidFill>
+                    </a:lnB>
+                  </a:tcPr>
+                </a:tc>
+                <a:tc>
+                  <a:txBody>
+                    <a:bodyPr/>
+                    <a:lstStyle/>
+                    <a:p>
+                      <a:r>
+                        <a:rPr sz="1300" b="0">
+                          <a:solidFill>
+                            <a:srgbClr val="5E5E5E"/>
+                          </a:solidFill>
+                          <a:latin typeface="Pretendard Medium"/>
+                        </a:rPr>
+                        <a:t>규제, 단순화, 데이터 추가</a:t>
+                      </a:r>
+                    </a:p>
+                  </a:txBody>
+                  <a:tcPr marL="101600" marR="101600" marT="101600" marB="101600" anchor="ctr">
+                    <a:solidFill>
+                      <a:srgbClr val="FFFFFF"/>
+                    </a:solidFill>
+                    <a:lnL w="0">
+                      <a:noFill/>
+                    </a:lnL>
+                    <a:lnR w="0">
+                      <a:noFill/>
+                    </a:lnR>
+                    <a:lnT w="0">
+                      <a:noFill/>
+                    </a:lnT>
+                    <a:lnB w="9525">
+                      <a:solidFill>
+                        <a:srgbClr val="E2E2E2"/>
+                      </a:solidFill>
+                    </a:lnB>
+                  </a:tcPr>
+                </a:tc>
+              </a:tr>
+            </a:tbl>
+          </a:graphicData>
+        </a:graphic>
+      </p:graphicFrame>
       <p:sp>
         <p:nvSpPr>
           <p:cNvPr id="25" name="Slide Number Placeholder 0"/>
@@ -6494,285 +8213,7 @@
             <a:pPr algn="r"/>
             <a:fld id="{F7021451-1387-4CA6-816F-3879F97B5CBC}" type="slidenum">
               <a:rPr b="0" lang="en-US"/>
-              <a:t>1004</a:t>
-            </a:fld>
-            <a:endParaRPr lang="en-US"/>
-          </a:p>
-        </p:txBody>
-      </p:sp>
-    </p:spTree>
-  </p:cSld>
-  <p:clrMapOvr>
-    <a:masterClrMapping/>
-  </p:clrMapOvr>
-</p:sld>
-</file>
-
-<file path=ppt/slides/slide17.xml><?xml version="1.0" encoding="utf-8"?>
-<p:sld xmlns:a="http://schemas.openxmlformats.org/drawingml/2006/main" xmlns:p="http://schemas.openxmlformats.org/presentationml/2006/main" xmlns:r="http://schemas.openxmlformats.org/officeDocument/2006/relationships">
-  <p:cSld>
-    <p:spTree>
-      <p:nvGrpSpPr>
-        <p:cNvPr id="1" name=""/>
-        <p:cNvGrpSpPr/>
-        <p:nvPr/>
-      </p:nvGrpSpPr>
-      <p:grpSpPr/>
-      <p:sp>
-        <p:nvSpPr>
-          <p:cNvPr id="2" name="Text Placeholder 1"/>
-          <p:cNvSpPr>
-            <a:spLocks noGrp="1"/>
-          </p:cNvSpPr>
-          <p:nvPr>
-            <p:ph type="body" idx="100"/>
-          </p:nvPr>
-        </p:nvSpPr>
-        <p:spPr/>
-        <p:txBody>
-          <a:bodyPr/>
-          <a:lstStyle/>
-          <a:p>
-            <a:r>
-              <a:t>04</a:t>
-            </a:r>
-          </a:p>
-        </p:txBody>
-      </p:sp>
-      <p:sp>
-        <p:nvSpPr>
-          <p:cNvPr id="3" name="Title 2"/>
-          <p:cNvSpPr>
-            <a:spLocks noGrp="1"/>
-          </p:cNvSpPr>
-          <p:nvPr>
-            <p:ph type="title" idx="101"/>
-          </p:nvPr>
-        </p:nvSpPr>
-        <p:spPr/>
-        <p:txBody>
-          <a:bodyPr/>
-          <a:lstStyle/>
-          <a:p>
-            <a:r>
-              <a:t>테스트와 검증</a:t>
-            </a:r>
-          </a:p>
-        </p:txBody>
-      </p:sp>
-      <p:sp>
-        <p:nvSpPr>
-          <p:cNvPr id="4" name="Text Placeholder 3"/>
-          <p:cNvSpPr>
-            <a:spLocks noGrp="1"/>
-          </p:cNvSpPr>
-          <p:nvPr>
-            <p:ph type="body" idx="102"/>
-          </p:nvPr>
-        </p:nvSpPr>
-        <p:spPr/>
-        <p:txBody>
-          <a:bodyPr/>
-          <a:lstStyle/>
-          <a:p>
-            <a:pPr>
-              <a:spcAft>
-                <a:spcPts val="1000"/>
-              </a:spcAft>
-            </a:pPr>
-            <a:r>
-              <a:rPr>
-                <a:solidFill>
-                  <a:srgbClr val="AFAFAF"/>
-                </a:solidFill>
-              </a:rPr>
-              <a:t>4.1  </a:t>
-            </a:r>
-            <a:r>
-              <a:t>일반화 성능의 측정</a:t>
-            </a:r>
-          </a:p>
-          <a:p>
-            <a:pPr>
-              <a:spcAft>
-                <a:spcPts val="1000"/>
-              </a:spcAft>
-            </a:pPr>
-            <a:r>
-              <a:rPr>
-                <a:solidFill>
-                  <a:srgbClr val="AFAFAF"/>
-                </a:solidFill>
-              </a:rPr>
-              <a:t>4.2  </a:t>
-            </a:r>
-            <a:r>
-              <a:t>검증 세트와 교차 검증</a:t>
-            </a:r>
-          </a:p>
-          <a:p>
-            <a:pPr>
-              <a:spcAft>
-                <a:spcPts val="1000"/>
-              </a:spcAft>
-            </a:pPr>
-            <a:r>
-              <a:rPr>
-                <a:solidFill>
-                  <a:srgbClr val="AFAFAF"/>
-                </a:solidFill>
-              </a:rPr>
-              <a:t>4.3  </a:t>
-            </a:r>
-            <a:r>
-              <a:t>데이터를 나누는 방식</a:t>
-            </a:r>
-          </a:p>
-        </p:txBody>
-      </p:sp>
-    </p:spTree>
-  </p:cSld>
-  <p:clrMapOvr>
-    <a:masterClrMapping/>
-  </p:clrMapOvr>
-</p:sld>
-</file>
-
-<file path=ppt/slides/slide18.xml><?xml version="1.0" encoding="utf-8"?>
-<p:sld xmlns:a="http://schemas.openxmlformats.org/drawingml/2006/main" xmlns:p="http://schemas.openxmlformats.org/presentationml/2006/main" xmlns:r="http://schemas.openxmlformats.org/officeDocument/2006/relationships">
-  <p:cSld>
-    <p:spTree>
-      <p:nvGrpSpPr>
-        <p:cNvPr id="1" name=""/>
-        <p:cNvGrpSpPr/>
-        <p:nvPr/>
-      </p:nvGrpSpPr>
-      <p:grpSpPr/>
-      <p:sp>
-        <p:nvSpPr>
-          <p:cNvPr id="2" name="Title 1"/>
-          <p:cNvSpPr>
-            <a:spLocks noGrp="1"/>
-          </p:cNvSpPr>
-          <p:nvPr>
-            <p:ph type="title" idx="100"/>
-          </p:nvPr>
-        </p:nvSpPr>
-        <p:spPr/>
-        <p:txBody>
-          <a:bodyPr/>
-          <a:lstStyle/>
-          <a:p>
-            <a:r>
-              <a:t>4.1 일반화 성능의 측정</a:t>
-            </a:r>
-          </a:p>
-        </p:txBody>
-      </p:sp>
-      <p:sp>
-        <p:nvSpPr>
-          <p:cNvPr id="3" name="Text Placeholder 2"/>
-          <p:cNvSpPr>
-            <a:spLocks noGrp="1"/>
-          </p:cNvSpPr>
-          <p:nvPr>
-            <p:ph type="body" idx="101"/>
-          </p:nvPr>
-        </p:nvSpPr>
-        <p:spPr/>
-        <p:txBody>
-          <a:bodyPr/>
-          <a:lstStyle/>
-          <a:p>
-            <a:r>
-              <a:t>4. 테스트와 검증</a:t>
-            </a:r>
-          </a:p>
-        </p:txBody>
-      </p:sp>
-      <p:sp>
-        <p:nvSpPr>
-          <p:cNvPr id="4" name="Text Placeholder 3"/>
-          <p:cNvSpPr>
-            <a:spLocks noGrp="1"/>
-          </p:cNvSpPr>
-          <p:nvPr>
-            <p:ph type="body" idx="102"/>
-          </p:nvPr>
-        </p:nvSpPr>
-        <p:spPr/>
-        <p:txBody>
-          <a:bodyPr/>
-          <a:lstStyle/>
-          <a:p>
-            <a:pPr/>
-            <a:r>
-              <a:t>일반화 성능은 새 데이터로만 측정 — 훈련과 테스트를 분리</a:t>
-            </a:r>
-          </a:p>
-          <a:p>
-            <a:pPr/>
-            <a:r>
-              <a:t>훈련 오차가 낮아도 일반화 오차가 크면 과대적합</a:t>
-            </a:r>
-          </a:p>
-          <a:p>
-            <a:pPr/>
-            <a:r>
-              <a:t>관례: 훈련 80% · 테스트 20%</a:t>
-            </a:r>
-          </a:p>
-          <a:p>
-            <a:pPr/>
-            <a:r>
-              <a:t>테스트 세트는 마지막에 한 번만 사용</a:t>
-            </a:r>
-          </a:p>
-        </p:txBody>
-      </p:sp>
-      <p:sp>
-        <p:nvSpPr>
-          <p:cNvPr id="25" name="Slide Number Placeholder 0"/>
-          <p:cNvSpPr>
-            <a:spLocks noGrp="1"/>
-          </p:cNvSpPr>
-          <p:nvPr>
-            <p:ph type="sldNum" sz="quarter" idx="4294967295"/>
-          </p:nvPr>
-        </p:nvSpPr>
-        <p:spPr>
-          <a:xfrm>
-            <a:off x="10591495" y="6355080"/>
-            <a:ext cx="914400" cy="274320"/>
-          </a:xfrm>
-          <a:prstGeom prst="rect">
-            <a:avLst/>
-          </a:prstGeom>
-          <a:extLst>
-            <a:ext uri="{C572A759-6A51-4108-AA02-DFA0A04FC94B}">
-              <ma14:wrappingTextBoxFlag xmlns:ma14="http://schemas.microsoft.com/office/mac/drawingml/2011/main" val="0"/>
-            </a:ext>
-          </a:extLst>
-        </p:spPr>
-        <p:txBody>
-          <a:bodyPr/>
-          <a:lstStyle>
-            <a:lvl1pPr>
-              <a:defRPr sz="1000">
-                <a:solidFill>
-                  <a:srgbClr val="AFAFAF"/>
-                </a:solidFill>
-                <a:latin typeface="Pretendard Medium"/>
-                <a:ea typeface="Pretendard Medium"/>
-                <a:cs typeface="Pretendard Medium"/>
-              </a:defRPr>
-            </a:lvl1pPr>
-          </a:lstStyle>
-          <a:p>
-            <a:pPr algn="r"/>
-            <a:fld id="{F7021451-1387-4CA6-816F-3879F97B5CBC}" type="slidenum">
-              <a:rPr b="0" lang="en-US"/>
-              <a:t>1004</a:t>
+              <a:t>1008</a:t>
             </a:fld>
             <a:endParaRPr lang="en-US"/>
           </a:p>
@@ -6798,12 +8239,12 @@
       <p:grpSpPr/>
       <p:sp>
         <p:nvSpPr>
-          <p:cNvPr id="2" name="Title 1"/>
-          <p:cNvSpPr>
-            <a:spLocks noGrp="1"/>
-          </p:cNvSpPr>
-          <p:nvPr>
-            <p:ph type="title" idx="100"/>
+          <p:cNvPr id="2" name="Text Placeholder 1"/>
+          <p:cNvSpPr>
+            <a:spLocks noGrp="1"/>
+          </p:cNvSpPr>
+          <p:nvPr>
+            <p:ph type="body" idx="100"/>
           </p:nvPr>
         </p:nvSpPr>
         <p:spPr/>
@@ -6812,19 +8253,19 @@
           <a:lstStyle/>
           <a:p>
             <a:r>
-              <a:t>4.2 검증 세트와 교차 검증</a:t>
-            </a:r>
-          </a:p>
-        </p:txBody>
-      </p:sp>
-      <p:sp>
-        <p:nvSpPr>
-          <p:cNvPr id="3" name="Text Placeholder 2"/>
-          <p:cNvSpPr>
-            <a:spLocks noGrp="1"/>
-          </p:cNvSpPr>
-          <p:nvPr>
-            <p:ph type="body" idx="101"/>
+              <a:t>04</a:t>
+            </a:r>
+          </a:p>
+        </p:txBody>
+      </p:sp>
+      <p:sp>
+        <p:nvSpPr>
+          <p:cNvPr id="3" name="Title 2"/>
+          <p:cNvSpPr>
+            <a:spLocks noGrp="1"/>
+          </p:cNvSpPr>
+          <p:nvPr>
+            <p:ph type="title" idx="101"/>
           </p:nvPr>
         </p:nvSpPr>
         <p:spPr/>
@@ -6833,7 +8274,7 @@
           <a:lstStyle/>
           <a:p>
             <a:r>
-              <a:t>4. 테스트와 검증</a:t>
+              <a:t>테스트와 검증</a:t>
             </a:r>
           </a:p>
         </p:txBody>
@@ -6853,82 +8294,76 @@
           <a:bodyPr/>
           <a:lstStyle/>
           <a:p>
-            <a:pPr/>
-            <a:r>
-              <a:t>테스트로 모델을 고르면 테스트에 과대적합</a:t>
-            </a:r>
-          </a:p>
-          <a:p>
-            <a:pPr lvl="1"/>
-            <a:r>
-              <a:t>선택과 튜닝에 쓸 검증 세트를 따로 확보</a:t>
-            </a:r>
-          </a:p>
-          <a:p>
-            <a:pPr/>
-            <a:r>
-              <a:t>검증 세트가 작으면 평가가 불안정</a:t>
-            </a:r>
-          </a:p>
-          <a:p>
-            <a:pPr lvl="1"/>
-            <a:r>
-              <a:t>교차 검증으로 여러 번 나눠 평균</a:t>
-            </a:r>
-          </a:p>
-          <a:p>
-            <a:pPr/>
-            <a:r>
-              <a:t>훈련·검증·테스트의 역할은 서로 바뀌지 않음</a:t>
-            </a:r>
-          </a:p>
-        </p:txBody>
-      </p:sp>
-      <p:sp>
-        <p:nvSpPr>
-          <p:cNvPr id="25" name="Slide Number Placeholder 0"/>
-          <p:cNvSpPr>
-            <a:spLocks noGrp="1"/>
-          </p:cNvSpPr>
-          <p:nvPr>
-            <p:ph type="sldNum" sz="quarter" idx="4294967295"/>
-          </p:nvPr>
-        </p:nvSpPr>
-        <p:spPr>
-          <a:xfrm>
-            <a:off x="10591495" y="6355080"/>
-            <a:ext cx="914400" cy="274320"/>
-          </a:xfrm>
-          <a:prstGeom prst="rect">
-            <a:avLst/>
-          </a:prstGeom>
-          <a:extLst>
-            <a:ext uri="{C572A759-6A51-4108-AA02-DFA0A04FC94B}">
-              <ma14:wrappingTextBoxFlag xmlns:ma14="http://schemas.microsoft.com/office/mac/drawingml/2011/main" val="0"/>
-            </a:ext>
-          </a:extLst>
-        </p:spPr>
-        <p:txBody>
-          <a:bodyPr/>
-          <a:lstStyle>
-            <a:lvl1pPr>
-              <a:defRPr sz="1000">
+            <a:pPr>
+              <a:spcAft>
+                <a:spcPts val="1000"/>
+              </a:spcAft>
+            </a:pPr>
+            <a:r>
+              <a:rPr>
                 <a:solidFill>
                   <a:srgbClr val="AFAFAF"/>
                 </a:solidFill>
-                <a:latin typeface="Pretendard Medium"/>
-                <a:ea typeface="Pretendard Medium"/>
-                <a:cs typeface="Pretendard Medium"/>
-              </a:defRPr>
-            </a:lvl1pPr>
-          </a:lstStyle>
-          <a:p>
-            <a:pPr algn="r"/>
-            <a:fld id="{F7021451-1387-4CA6-816F-3879F97B5CBC}" type="slidenum">
-              <a:rPr b="0" lang="en-US"/>
-              <a:t>1004</a:t>
-            </a:fld>
-            <a:endParaRPr lang="en-US"/>
+              </a:rPr>
+              <a:t>4.1  </a:t>
+            </a:r>
+            <a:r>
+              <a:t>일반화 오차와 테스트 세트</a:t>
+            </a:r>
+          </a:p>
+          <a:p>
+            <a:pPr>
+              <a:spcAft>
+                <a:spcPts val="1000"/>
+              </a:spcAft>
+            </a:pPr>
+            <a:r>
+              <a:rPr>
+                <a:solidFill>
+                  <a:srgbClr val="AFAFAF"/>
+                </a:solidFill>
+              </a:rPr>
+              <a:t>4.2  </a:t>
+            </a:r>
+            <a:r>
+              <a:t>하이퍼파라미터 튜닝과 모델 선택</a:t>
+            </a:r>
+          </a:p>
+          <a:p>
+            <a:pPr>
+              <a:spcAft>
+                <a:spcPts val="1000"/>
+              </a:spcAft>
+            </a:pPr>
+            <a:r>
+              <a:rPr>
+                <a:solidFill>
+                  <a:srgbClr val="AFAFAF"/>
+                </a:solidFill>
+              </a:rPr>
+              <a:t>4.3  </a:t>
+            </a:r>
+            <a:r>
+              <a:t>데이터 불일치</a:t>
+            </a:r>
+          </a:p>
+          <a:p>
+            <a:pPr>
+              <a:spcAft>
+                <a:spcPts val="1000"/>
+              </a:spcAft>
+            </a:pPr>
+            <a:r>
+              <a:rPr>
+                <a:solidFill>
+                  <a:srgbClr val="AFAFAF"/>
+                </a:solidFill>
+              </a:rPr>
+              <a:t>4.4  </a:t>
+            </a:r>
+            <a:r>
+              <a:t>시간 순서 분할</a:t>
+            </a:r>
           </a:p>
         </p:txBody>
       </p:sp>
@@ -7064,7 +8499,7 @@
                           </a:solidFill>
                           <a:latin typeface="Pretendard"/>
                         </a:rPr>
-                        <a:t>머신러닝이란</a:t>
+                        <a:t>머신러닝의 정의와 사용 이유</a:t>
                       </a:r>
                     </a:p>
                   </a:txBody>
@@ -7100,7 +8535,7 @@
                           </a:solidFill>
                           <a:latin typeface="Pretendard Medium"/>
                         </a:rPr>
-                        <a:t>1.1 오늘의 범위  ·  1.2 머신러닝의 정의  ·  1.3 규칙 기반의 한계  ·  1.4 머신러닝이 유리한 경우</a:t>
+                        <a:t>1.1 교재 1장의 구성  ·  1.2 머신러닝의 정의  ·  1.3 머신러닝을 사용하는 이유  ·  1.4 애플리케이션 사례</a:t>
                       </a:r>
                     </a:p>
                   </a:txBody>
@@ -7210,7 +8645,7 @@
                           </a:solidFill>
                           <a:latin typeface="Pretendard Medium"/>
                         </a:rPr>
-                        <a:t>2.1 세 개의 축  ·  2.2 훈련 지도 방식  ·  2.3 배치 학습과 온라인 학습  ·  2.4 사례 기반과 모델 기반</a:t>
+                        <a:t>2.1 세 가지 분류 기준  ·  2.2 지도 학습과 비지도 학습  ·  2.3 준지도·자기 지도·강화 학습  ·  2.4 배치 학습과 온라인 학습  ·  2.5 사례 기반 학습과 모델 기반 학습</a:t>
                       </a:r>
                     </a:p>
                   </a:txBody>
@@ -7284,7 +8719,7 @@
                           </a:solidFill>
                           <a:latin typeface="Pretendard"/>
                         </a:rPr>
-                        <a:t>주요 도전 과제</a:t>
+                        <a:t>머신러닝의 주요 도전 과제</a:t>
                       </a:r>
                     </a:p>
                   </a:txBody>
@@ -7320,7 +8755,7 @@
                           </a:solidFill>
                           <a:latin typeface="Pretendard Medium"/>
                         </a:rPr>
-                        <a:t>3.1 나쁜 데이터의 네 가지  ·  3.2 과대적합과 과소적합  ·  3.3 규제와 하이퍼파라미터</a:t>
+                        <a:t>3.1 나쁜 데이터 — 양과 대표성  ·  3.2 나쁜 데이터 — 품질과 특성  ·  3.3 훈련 데이터 과대적합  ·  3.4 훈련 데이터 과소적합</a:t>
                       </a:r>
                     </a:p>
                   </a:txBody>
@@ -7430,7 +8865,7 @@
                           </a:solidFill>
                           <a:latin typeface="Pretendard Medium"/>
                         </a:rPr>
-                        <a:t>4.1 일반화 성능의 측정  ·  4.2 검증 세트와 교차 검증  ·  4.3 데이터를 나누는 방식</a:t>
+                        <a:t>4.1 일반화 오차와 테스트 세트  ·  4.2 하이퍼파라미터 튜닝과 모델 선택  ·  4.3 데이터 불일치  ·  4.4 시간 순서 분할</a:t>
                       </a:r>
                     </a:p>
                   </a:txBody>
@@ -7651,7 +9086,7 @@
           <a:lstStyle/>
           <a:p>
             <a:r>
-              <a:t>4.3 데이터를 나누는 방식</a:t>
+              <a:t>4.1 일반화 오차와 테스트 세트</a:t>
             </a:r>
           </a:p>
         </p:txBody>
@@ -7694,25 +9129,517 @@
           <a:p>
             <a:pPr/>
             <a:r>
-              <a:t>무작위 분할: 시기가 섞임</a:t>
+              <a:t>새 샘플에 실제로 적용해야 일반화를 알 수 있음</a:t>
             </a:r>
           </a:p>
           <a:p>
             <a:pPr/>
             <a:r>
-              <a:t>시간 순서 분할: 과거로 학습</a:t>
+              <a:rPr b="1">
+                <a:latin typeface="Pretendard"/>
+              </a:rPr>
+              <a:t>일반화 오차</a:t>
+            </a:r>
+            <a:r>
+              <a:t> — 새 샘플에 대한 오차 비율</a:t>
+            </a:r>
+          </a:p>
+          <a:p>
+            <a:pPr lvl="1"/>
+            <a:r>
+              <a:t>외부 샘플 오차라고도 부름</a:t>
             </a:r>
           </a:p>
           <a:p>
             <a:pPr/>
             <a:r>
-              <a:t>시간 정보가 있으면 후자</a:t>
+              <a:t>훈련 오차가 작은데 일반화 오차가 크면 과대적합</a:t>
             </a:r>
           </a:p>
           <a:p>
             <a:pPr/>
             <a:r>
-              <a:t>무작위 분할은 성능 과대평가</a:t>
+              <a:t>관례는 훈련 80% · 테스트 20% — 크면 비율을 낮춤</a:t>
+            </a:r>
+          </a:p>
+        </p:txBody>
+      </p:sp>
+      <p:sp>
+        <p:nvSpPr>
+          <p:cNvPr id="25" name="Slide Number Placeholder 0"/>
+          <p:cNvSpPr>
+            <a:spLocks noGrp="1"/>
+          </p:cNvSpPr>
+          <p:nvPr>
+            <p:ph type="sldNum" sz="quarter" idx="4294967295"/>
+          </p:nvPr>
+        </p:nvSpPr>
+        <p:spPr>
+          <a:xfrm>
+            <a:off x="10591495" y="6355080"/>
+            <a:ext cx="914400" cy="274320"/>
+          </a:xfrm>
+          <a:prstGeom prst="rect">
+            <a:avLst/>
+          </a:prstGeom>
+          <a:extLst>
+            <a:ext uri="{C572A759-6A51-4108-AA02-DFA0A04FC94B}">
+              <ma14:wrappingTextBoxFlag xmlns:ma14="http://schemas.microsoft.com/office/mac/drawingml/2011/main" val="0"/>
+            </a:ext>
+          </a:extLst>
+        </p:spPr>
+        <p:txBody>
+          <a:bodyPr/>
+          <a:lstStyle>
+            <a:lvl1pPr>
+              <a:defRPr sz="1000">
+                <a:solidFill>
+                  <a:srgbClr val="AFAFAF"/>
+                </a:solidFill>
+                <a:latin typeface="Pretendard Medium"/>
+                <a:ea typeface="Pretendard Medium"/>
+                <a:cs typeface="Pretendard Medium"/>
+              </a:defRPr>
+            </a:lvl1pPr>
+          </a:lstStyle>
+          <a:p>
+            <a:pPr algn="r"/>
+            <a:fld id="{F7021451-1387-4CA6-816F-3879F97B5CBC}" type="slidenum">
+              <a:rPr b="0" lang="en-US"/>
+              <a:t>1004</a:t>
+            </a:fld>
+            <a:endParaRPr lang="en-US"/>
+          </a:p>
+        </p:txBody>
+      </p:sp>
+    </p:spTree>
+  </p:cSld>
+  <p:clrMapOvr>
+    <a:masterClrMapping/>
+  </p:clrMapOvr>
+</p:sld>
+</file>
+
+<file path=ppt/slides/slide21.xml><?xml version="1.0" encoding="utf-8"?>
+<p:sld xmlns:a="http://schemas.openxmlformats.org/drawingml/2006/main" xmlns:p="http://schemas.openxmlformats.org/presentationml/2006/main" xmlns:r="http://schemas.openxmlformats.org/officeDocument/2006/relationships">
+  <p:cSld>
+    <p:spTree>
+      <p:nvGrpSpPr>
+        <p:cNvPr id="1" name=""/>
+        <p:cNvGrpSpPr/>
+        <p:nvPr/>
+      </p:nvGrpSpPr>
+      <p:grpSpPr/>
+      <p:sp>
+        <p:nvSpPr>
+          <p:cNvPr id="2" name="Title 1"/>
+          <p:cNvSpPr>
+            <a:spLocks noGrp="1"/>
+          </p:cNvSpPr>
+          <p:nvPr>
+            <p:ph type="title" idx="100"/>
+          </p:nvPr>
+        </p:nvSpPr>
+        <p:spPr/>
+        <p:txBody>
+          <a:bodyPr/>
+          <a:lstStyle/>
+          <a:p>
+            <a:r>
+              <a:t>4.2 하이퍼파라미터 튜닝과 모델 선택</a:t>
+            </a:r>
+          </a:p>
+        </p:txBody>
+      </p:sp>
+      <p:sp>
+        <p:nvSpPr>
+          <p:cNvPr id="3" name="Text Placeholder 2"/>
+          <p:cNvSpPr>
+            <a:spLocks noGrp="1"/>
+          </p:cNvSpPr>
+          <p:nvPr>
+            <p:ph type="body" idx="101"/>
+          </p:nvPr>
+        </p:nvSpPr>
+        <p:spPr/>
+        <p:txBody>
+          <a:bodyPr/>
+          <a:lstStyle/>
+          <a:p>
+            <a:r>
+              <a:t>4. 테스트와 검증</a:t>
+            </a:r>
+          </a:p>
+        </p:txBody>
+      </p:sp>
+      <p:sp>
+        <p:nvSpPr>
+          <p:cNvPr id="4" name="Text Placeholder 3"/>
+          <p:cNvSpPr>
+            <a:spLocks noGrp="1"/>
+          </p:cNvSpPr>
+          <p:nvPr>
+            <p:ph type="body" idx="102"/>
+          </p:nvPr>
+        </p:nvSpPr>
+        <p:spPr/>
+        <p:txBody>
+          <a:bodyPr/>
+          <a:lstStyle/>
+          <a:p>
+            <a:pPr/>
+            <a:r>
+              <a:t>테스트로 모델을 고르면 테스트에 최적화됨</a:t>
+            </a:r>
+          </a:p>
+          <a:p>
+            <a:pPr/>
+            <a:r>
+              <a:rPr b="1">
+                <a:latin typeface="Pretendard"/>
+              </a:rPr>
+              <a:t>홀드아웃 검증</a:t>
+            </a:r>
+            <a:r>
+              <a:t> — 검증 세트를 떼어 후보 비교</a:t>
+            </a:r>
+          </a:p>
+          <a:p>
+            <a:pPr lvl="1"/>
+            <a:r>
+              <a:t>개발 세트·데브 세트라고도 부름</a:t>
+            </a:r>
+          </a:p>
+          <a:p>
+            <a:pPr/>
+            <a:r>
+              <a:t>검증 세트가 작으면 잘못 고르고, 크면 훈련이 줄어듦</a:t>
+            </a:r>
+          </a:p>
+          <a:p>
+            <a:pPr/>
+            <a:r>
+              <a:rPr b="1">
+                <a:latin typeface="Pretendard"/>
+              </a:rPr>
+              <a:t>교차 검증</a:t>
+            </a:r>
+            <a:r>
+              <a:t> — 작은 검증 세트를 여러 개로 반복</a:t>
+            </a:r>
+          </a:p>
+        </p:txBody>
+      </p:sp>
+      <p:sp>
+        <p:nvSpPr>
+          <p:cNvPr id="25" name="Slide Number Placeholder 0"/>
+          <p:cNvSpPr>
+            <a:spLocks noGrp="1"/>
+          </p:cNvSpPr>
+          <p:nvPr>
+            <p:ph type="sldNum" sz="quarter" idx="4294967295"/>
+          </p:nvPr>
+        </p:nvSpPr>
+        <p:spPr>
+          <a:xfrm>
+            <a:off x="10591495" y="6355080"/>
+            <a:ext cx="914400" cy="274320"/>
+          </a:xfrm>
+          <a:prstGeom prst="rect">
+            <a:avLst/>
+          </a:prstGeom>
+          <a:extLst>
+            <a:ext uri="{C572A759-6A51-4108-AA02-DFA0A04FC94B}">
+              <ma14:wrappingTextBoxFlag xmlns:ma14="http://schemas.microsoft.com/office/mac/drawingml/2011/main" val="0"/>
+            </a:ext>
+          </a:extLst>
+        </p:spPr>
+        <p:txBody>
+          <a:bodyPr/>
+          <a:lstStyle>
+            <a:lvl1pPr>
+              <a:defRPr sz="1000">
+                <a:solidFill>
+                  <a:srgbClr val="AFAFAF"/>
+                </a:solidFill>
+                <a:latin typeface="Pretendard Medium"/>
+                <a:ea typeface="Pretendard Medium"/>
+                <a:cs typeface="Pretendard Medium"/>
+              </a:defRPr>
+            </a:lvl1pPr>
+          </a:lstStyle>
+          <a:p>
+            <a:pPr algn="r"/>
+            <a:fld id="{F7021451-1387-4CA6-816F-3879F97B5CBC}" type="slidenum">
+              <a:rPr b="0" lang="en-US"/>
+              <a:t>1004</a:t>
+            </a:fld>
+            <a:endParaRPr lang="en-US"/>
+          </a:p>
+        </p:txBody>
+      </p:sp>
+    </p:spTree>
+  </p:cSld>
+  <p:clrMapOvr>
+    <a:masterClrMapping/>
+  </p:clrMapOvr>
+</p:sld>
+</file>
+
+<file path=ppt/slides/slide22.xml><?xml version="1.0" encoding="utf-8"?>
+<p:sld xmlns:a="http://schemas.openxmlformats.org/drawingml/2006/main" xmlns:p="http://schemas.openxmlformats.org/presentationml/2006/main" xmlns:r="http://schemas.openxmlformats.org/officeDocument/2006/relationships">
+  <p:cSld>
+    <p:spTree>
+      <p:nvGrpSpPr>
+        <p:cNvPr id="1" name=""/>
+        <p:cNvGrpSpPr/>
+        <p:nvPr/>
+      </p:nvGrpSpPr>
+      <p:grpSpPr/>
+      <p:sp>
+        <p:nvSpPr>
+          <p:cNvPr id="2" name="Title 1"/>
+          <p:cNvSpPr>
+            <a:spLocks noGrp="1"/>
+          </p:cNvSpPr>
+          <p:nvPr>
+            <p:ph type="title" idx="100"/>
+          </p:nvPr>
+        </p:nvSpPr>
+        <p:spPr/>
+        <p:txBody>
+          <a:bodyPr/>
+          <a:lstStyle/>
+          <a:p>
+            <a:r>
+              <a:t>4.3 데이터 불일치</a:t>
+            </a:r>
+          </a:p>
+        </p:txBody>
+      </p:sp>
+      <p:sp>
+        <p:nvSpPr>
+          <p:cNvPr id="3" name="Text Placeholder 2"/>
+          <p:cNvSpPr>
+            <a:spLocks noGrp="1"/>
+          </p:cNvSpPr>
+          <p:nvPr>
+            <p:ph type="body" idx="101"/>
+          </p:nvPr>
+        </p:nvSpPr>
+        <p:spPr/>
+        <p:txBody>
+          <a:bodyPr/>
+          <a:lstStyle/>
+          <a:p>
+            <a:r>
+              <a:t>4. 테스트와 검증</a:t>
+            </a:r>
+          </a:p>
+        </p:txBody>
+      </p:sp>
+      <p:sp>
+        <p:nvSpPr>
+          <p:cNvPr id="4" name="Text Placeholder 3"/>
+          <p:cNvSpPr>
+            <a:spLocks noGrp="1"/>
+          </p:cNvSpPr>
+          <p:nvPr>
+            <p:ph type="body" idx="102"/>
+          </p:nvPr>
+        </p:nvSpPr>
+        <p:spPr/>
+        <p:txBody>
+          <a:bodyPr/>
+          <a:lstStyle/>
+          <a:p>
+            <a:pPr/>
+            <a:r>
+              <a:t>훈련 데이터가 실제 데이터를 대표하지 못하는 경우</a:t>
+            </a:r>
+          </a:p>
+          <a:p>
+            <a:pPr/>
+            <a:r>
+              <a:t>검증 세트와 테스트 세트는 실전 데이터로만 구성</a:t>
+            </a:r>
+          </a:p>
+          <a:p>
+            <a:pPr/>
+            <a:r>
+              <a:rPr b="1">
+                <a:latin typeface="Pretendard"/>
+              </a:rPr>
+              <a:t>훈련-개발 세트</a:t>
+            </a:r>
+            <a:r>
+              <a:t> — 훈련 데이터 일부를 떼어 진단</a:t>
+            </a:r>
+          </a:p>
+          <a:p>
+            <a:pPr lvl="1"/>
+            <a:r>
+              <a:t>훈련-개발에서 나쁘면 과대적합</a:t>
+            </a:r>
+          </a:p>
+          <a:p>
+            <a:pPr lvl="1"/>
+            <a:r>
+              <a:t>훈련-개발은 좋은데 검증이 나쁘면 데이터 불일치</a:t>
+            </a:r>
+          </a:p>
+        </p:txBody>
+      </p:sp>
+      <p:sp>
+        <p:nvSpPr>
+          <p:cNvPr id="25" name="Slide Number Placeholder 0"/>
+          <p:cNvSpPr>
+            <a:spLocks noGrp="1"/>
+          </p:cNvSpPr>
+          <p:nvPr>
+            <p:ph type="sldNum" sz="quarter" idx="4294967295"/>
+          </p:nvPr>
+        </p:nvSpPr>
+        <p:spPr>
+          <a:xfrm>
+            <a:off x="10591495" y="6355080"/>
+            <a:ext cx="914400" cy="274320"/>
+          </a:xfrm>
+          <a:prstGeom prst="rect">
+            <a:avLst/>
+          </a:prstGeom>
+          <a:extLst>
+            <a:ext uri="{C572A759-6A51-4108-AA02-DFA0A04FC94B}">
+              <ma14:wrappingTextBoxFlag xmlns:ma14="http://schemas.microsoft.com/office/mac/drawingml/2011/main" val="0"/>
+            </a:ext>
+          </a:extLst>
+        </p:spPr>
+        <p:txBody>
+          <a:bodyPr/>
+          <a:lstStyle>
+            <a:lvl1pPr>
+              <a:defRPr sz="1000">
+                <a:solidFill>
+                  <a:srgbClr val="AFAFAF"/>
+                </a:solidFill>
+                <a:latin typeface="Pretendard Medium"/>
+                <a:ea typeface="Pretendard Medium"/>
+                <a:cs typeface="Pretendard Medium"/>
+              </a:defRPr>
+            </a:lvl1pPr>
+          </a:lstStyle>
+          <a:p>
+            <a:pPr algn="r"/>
+            <a:fld id="{F7021451-1387-4CA6-816F-3879F97B5CBC}" type="slidenum">
+              <a:rPr b="0" lang="en-US"/>
+              <a:t>1004</a:t>
+            </a:fld>
+            <a:endParaRPr lang="en-US"/>
+          </a:p>
+        </p:txBody>
+      </p:sp>
+    </p:spTree>
+  </p:cSld>
+  <p:clrMapOvr>
+    <a:masterClrMapping/>
+  </p:clrMapOvr>
+</p:sld>
+</file>
+
+<file path=ppt/slides/slide23.xml><?xml version="1.0" encoding="utf-8"?>
+<p:sld xmlns:a="http://schemas.openxmlformats.org/drawingml/2006/main" xmlns:p="http://schemas.openxmlformats.org/presentationml/2006/main" xmlns:r="http://schemas.openxmlformats.org/officeDocument/2006/relationships">
+  <p:cSld>
+    <p:spTree>
+      <p:nvGrpSpPr>
+        <p:cNvPr id="1" name=""/>
+        <p:cNvGrpSpPr/>
+        <p:nvPr/>
+      </p:nvGrpSpPr>
+      <p:grpSpPr/>
+      <p:sp>
+        <p:nvSpPr>
+          <p:cNvPr id="2" name="Title 1"/>
+          <p:cNvSpPr>
+            <a:spLocks noGrp="1"/>
+          </p:cNvSpPr>
+          <p:nvPr>
+            <p:ph type="title" idx="100"/>
+          </p:nvPr>
+        </p:nvSpPr>
+        <p:spPr/>
+        <p:txBody>
+          <a:bodyPr/>
+          <a:lstStyle/>
+          <a:p>
+            <a:r>
+              <a:t>4.4 시간 순서 분할</a:t>
+            </a:r>
+          </a:p>
+        </p:txBody>
+      </p:sp>
+      <p:sp>
+        <p:nvSpPr>
+          <p:cNvPr id="3" name="Text Placeholder 2"/>
+          <p:cNvSpPr>
+            <a:spLocks noGrp="1"/>
+          </p:cNvSpPr>
+          <p:nvPr>
+            <p:ph type="body" idx="101"/>
+          </p:nvPr>
+        </p:nvSpPr>
+        <p:spPr/>
+        <p:txBody>
+          <a:bodyPr/>
+          <a:lstStyle/>
+          <a:p>
+            <a:r>
+              <a:t>4. 테스트와 검증</a:t>
+            </a:r>
+          </a:p>
+        </p:txBody>
+      </p:sp>
+      <p:sp>
+        <p:nvSpPr>
+          <p:cNvPr id="4" name="Text Placeholder 3"/>
+          <p:cNvSpPr>
+            <a:spLocks noGrp="1"/>
+          </p:cNvSpPr>
+          <p:nvPr>
+            <p:ph type="body" idx="102"/>
+          </p:nvPr>
+        </p:nvSpPr>
+        <p:spPr/>
+        <p:txBody>
+          <a:bodyPr/>
+          <a:lstStyle/>
+          <a:p>
+            <a:pPr/>
+            <a:r>
+              <a:t>무작위 분할은 시기가 섞임</a:t>
+            </a:r>
+          </a:p>
+          <a:p>
+            <a:pPr/>
+            <a:r>
+              <a:t>미래가 훈련에 들어감</a:t>
+            </a:r>
+          </a:p>
+          <a:p>
+            <a:pPr/>
+            <a:r>
+              <a:t>시간 순서는 과거로 학습</a:t>
+            </a:r>
+          </a:p>
+          <a:p>
+            <a:pPr/>
+            <a:r>
+              <a:t>미래 구간으로 평가</a:t>
+            </a:r>
+          </a:p>
+          <a:p>
+            <a:pPr/>
+            <a:r>
+              <a:t>교재 밖 · 이 수업의 보강</a:t>
             </a:r>
           </a:p>
         </p:txBody>
@@ -7818,7 +9745,7 @@
 </p:sld>
 </file>
 
-<file path=ppt/slides/slide21.xml><?xml version="1.0" encoding="utf-8"?>
+<file path=ppt/slides/slide24.xml><?xml version="1.0" encoding="utf-8"?>
 <p:sld xmlns:a="http://schemas.openxmlformats.org/drawingml/2006/main" xmlns:p="http://schemas.openxmlformats.org/presentationml/2006/main" xmlns:r="http://schemas.openxmlformats.org/officeDocument/2006/relationships">
   <p:cSld>
     <p:spTree>
@@ -7930,7 +9857,7 @@
 </p:sld>
 </file>
 
-<file path=ppt/slides/slide22.xml><?xml version="1.0" encoding="utf-8"?>
+<file path=ppt/slides/slide25.xml><?xml version="1.0" encoding="utf-8"?>
 <p:sld xmlns:a="http://schemas.openxmlformats.org/drawingml/2006/main" xmlns:p="http://schemas.openxmlformats.org/presentationml/2006/main" xmlns:r="http://schemas.openxmlformats.org/officeDocument/2006/relationships">
   <p:cSld>
     <p:spTree>
@@ -7999,25 +9926,31 @@
           <a:p>
             <a:pPr/>
             <a:r>
-              <a:t>머신러닝: 규칙을 데이터에서 찾는 방법</a:t>
+              <a:t>머신러닝은 규칙을 코딩하지 않고 데이터에서 학습하는 것</a:t>
             </a:r>
           </a:p>
           <a:p>
             <a:pPr/>
             <a:r>
-              <a:t>시스템은 세 축의 조합 — 지도 방식, 학습 시점, 일반화 방식</a:t>
+              <a:t>시스템은 세 기준의 조합 — 지도 방식, 학습 시점, 일반화 방식</a:t>
             </a:r>
           </a:p>
           <a:p>
             <a:pPr/>
             <a:r>
-              <a:t>과대적합과 과소적합은 복잡도의 양쪽 끝, 규제로 조절</a:t>
+              <a:t>훈련 세트가 작거나 대표성이 없거나 잡음이 많으면 실패</a:t>
             </a:r>
           </a:p>
           <a:p>
             <a:pPr/>
             <a:r>
-              <a:t>성능 확인은 새 데이터로만 — 훈련·검증·테스트의 분리</a:t>
+              <a:t>모델은 너무 단순해도, 너무 복잡해도 안 됨</a:t>
+            </a:r>
+          </a:p>
+          <a:p>
+            <a:pPr/>
+            <a:r>
+              <a:t>일반화 성능은 새 데이터로만 확인 — 훈련·검증·테스트의 분리</a:t>
             </a:r>
           </a:p>
         </p:txBody>
@@ -8078,7 +10011,7 @@
 </p:sld>
 </file>
 
-<file path=ppt/slides/slide23.xml><?xml version="1.0" encoding="utf-8"?>
+<file path=ppt/slides/slide26.xml><?xml version="1.0" encoding="utf-8"?>
 <p:sld xmlns:a="http://schemas.openxmlformats.org/drawingml/2006/main" xmlns:p="http://schemas.openxmlformats.org/presentationml/2006/main" xmlns:r="http://schemas.openxmlformats.org/officeDocument/2006/relationships">
   <p:cSld>
     <p:spTree>
@@ -8159,13 +10092,19 @@
           <a:p>
             <a:pPr/>
             <a:r>
-              <a:t>교재 1장 읽기 — 오늘 다룬 절 중심</a:t>
+              <a:t>교재 1장 읽기 — 연습문제는 선택</a:t>
             </a:r>
           </a:p>
           <a:p>
             <a:pPr/>
             <a:r>
-              <a:t>다음 주: End-to-End 프로젝트 (핸즈온 Ch2)</a:t>
+              <a:t>공식 노트북 실행 — 01_the_machine_learning_landscape.ipynb</a:t>
+            </a:r>
+          </a:p>
+          <a:p>
+            <a:pPr/>
+            <a:r>
+              <a:t>다음 주: 머신러닝 프로젝트 처음부터 끝까지 (핸즈온 Ch2)</a:t>
             </a:r>
           </a:p>
         </p:txBody>
@@ -8226,7 +10165,7 @@
 </p:sld>
 </file>
 
-<file path=ppt/slides/slide24.xml><?xml version="1.0" encoding="utf-8"?>
+<file path=ppt/slides/slide27.xml><?xml version="1.0" encoding="utf-8"?>
 <p:sld xmlns:a="http://schemas.openxmlformats.org/drawingml/2006/main" xmlns:p="http://schemas.openxmlformats.org/presentationml/2006/main" xmlns:r="http://schemas.openxmlformats.org/officeDocument/2006/relationships">
   <p:cSld>
     <p:spTree>
@@ -8273,7 +10212,7 @@
           <a:lstStyle/>
           <a:p>
             <a:r>
-              <a:t>다음 주 — End-to-End 프로젝트 (핸즈온 Ch2)</a:t>
+              <a:t>다음 주 — 머신러닝 프로젝트 처음부터 끝까지 (핸즈온 Ch2)</a:t>
             </a:r>
           </a:p>
         </p:txBody>
@@ -8354,7 +10293,7 @@
           <a:lstStyle/>
           <a:p>
             <a:r>
-              <a:t>머신러닝이란</a:t>
+              <a:t>머신러닝의 정의와 사용 이유</a:t>
             </a:r>
           </a:p>
         </p:txBody>
@@ -8388,7 +10327,7 @@
               <a:t>1.1  </a:t>
             </a:r>
             <a:r>
-              <a:t>오늘의 범위</a:t>
+              <a:t>교재 1장의 구성</a:t>
             </a:r>
           </a:p>
           <a:p>
@@ -8424,7 +10363,7 @@
               <a:t>1.3  </a:t>
             </a:r>
             <a:r>
-              <a:t>규칙 기반의 한계</a:t>
+              <a:t>머신러닝을 사용하는 이유</a:t>
             </a:r>
           </a:p>
           <a:p>
@@ -8442,7 +10381,7 @@
               <a:t>1.4  </a:t>
             </a:r>
             <a:r>
-              <a:t>머신러닝이 유리한 경우</a:t>
+              <a:t>애플리케이션 사례</a:t>
             </a:r>
           </a:p>
         </p:txBody>
@@ -8481,7 +10420,7 @@
           <a:lstStyle/>
           <a:p>
             <a:r>
-              <a:t>1.1 오늘의 범위</a:t>
+              <a:t>1.1 교재 1장의 구성</a:t>
             </a:r>
           </a:p>
         </p:txBody>
@@ -8502,7 +10441,7 @@
           <a:lstStyle/>
           <a:p>
             <a:r>
-              <a:t>1. 머신러닝이란</a:t>
+              <a:t>1. 머신러닝의 정의와 사용 이유</a:t>
             </a:r>
           </a:p>
         </p:txBody>
@@ -8522,61 +10461,34 @@
           <a:bodyPr/>
           <a:lstStyle/>
           <a:p>
-            <a:pPr/>
-            <a:r>
-              <a:t>핸즈온 머신러닝 3판 1장 전체</a:t>
-            </a:r>
-          </a:p>
-          <a:p>
-            <a:pPr/>
-            <a:r>
-              <a:t>코드보다 용어와 판단 기준이 중심</a:t>
-            </a:r>
-          </a:p>
-        </p:txBody>
-      </p:sp>
-      <p:sp>
-        <p:nvSpPr>
-          <p:cNvPr id="5" name="Text Placeholder 4"/>
-          <p:cNvSpPr>
-            <a:spLocks noGrp="1"/>
-          </p:cNvSpPr>
-          <p:nvPr>
-            <p:ph type="body" idx="103"/>
-          </p:nvPr>
-        </p:nvSpPr>
-        <p:spPr/>
-        <p:txBody>
-          <a:bodyPr/>
-          <a:lstStyle/>
-          <a:p>
-            <a:r>
-              <a:t>표 1. 오늘 다루는 교재 절</a:t>
+            <a:r>
+              <a:t>표 1. 오늘 다루는 교재 1장의 절과 쪽</a:t>
             </a:r>
           </a:p>
         </p:txBody>
       </p:sp>
       <p:graphicFrame>
         <p:nvGraphicFramePr>
-          <p:cNvPr id="6" name="Table Placeholder 5"/>
+          <p:cNvPr id="5" name="Table Placeholder 4"/>
           <p:cNvGraphicFramePr>
             <a:graphicFrameLocks noGrp="1"/>
           </p:cNvGraphicFramePr>
           <p:nvPr>
-            <p:ph type="tbl" idx="104"/>
+            <p:ph type="tbl" idx="103"/>
           </p:nvPr>
         </p:nvGraphicFramePr>
         <p:xfrm>
-          <a:off x="4937760" y="1828800"/>
-          <a:ext cx="6565392" cy="2946400"/>
+          <a:off x="685800" y="1828800"/>
+          <a:ext cx="10820095" cy="3581400"/>
         </p:xfrm>
         <a:graphic>
           <a:graphicData uri="http://schemas.openxmlformats.org/drawingml/2006/table">
             <a:tbl>
               <a:tblPr firstRow="0" bandRow="0" firstCol="0" lastRow="0" lastCol="0" bandCol="0"/>
               <a:tblGrid>
-                <a:gridCol w="3282696"/>
-                <a:gridCol w="3282696"/>
+                <a:gridCol w="3606698"/>
+                <a:gridCol w="3606698"/>
+                <a:gridCol w="3606699"/>
               </a:tblGrid>
               <a:tr h="406400">
                 <a:tc>
@@ -8591,7 +10503,7 @@
                           </a:solidFill>
                           <a:latin typeface="Pretendard Medium"/>
                         </a:rPr>
-                        <a:t>교재 절</a:t>
+                        <a:t>절</a:t>
                       </a:r>
                     </a:p>
                   </a:txBody>
@@ -8625,7 +10537,41 @@
                           </a:solidFill>
                           <a:latin typeface="Pretendard Medium"/>
                         </a:rPr>
-                        <a:t>내용</a:t>
+                        <a:t>제목</a:t>
+                      </a:r>
+                    </a:p>
+                  </a:txBody>
+                  <a:tcPr marL="101600" marR="101600" marT="76200" marB="76200" anchor="ctr">
+                    <a:solidFill>
+                      <a:srgbClr val="000000"/>
+                    </a:solidFill>
+                    <a:lnL w="0">
+                      <a:noFill/>
+                    </a:lnL>
+                    <a:lnR w="0">
+                      <a:noFill/>
+                    </a:lnR>
+                    <a:lnT w="0">
+                      <a:noFill/>
+                    </a:lnT>
+                    <a:lnB w="0">
+                      <a:noFill/>
+                    </a:lnB>
+                  </a:tcPr>
+                </a:tc>
+                <a:tc>
+                  <a:txBody>
+                    <a:bodyPr/>
+                    <a:lstStyle/>
+                    <a:p>
+                      <a:r>
+                        <a:rPr sz="1300" b="0">
+                          <a:solidFill>
+                            <a:srgbClr val="FFFFFF"/>
+                          </a:solidFill>
+                          <a:latin typeface="Pretendard Medium"/>
+                        </a:rPr>
+                        <a:t>쪽</a:t>
                       </a:r>
                     </a:p>
                   </a:txBody>
@@ -8697,7 +10643,43 @@
                           </a:solidFill>
                           <a:latin typeface="Pretendard Medium"/>
                         </a:rPr>
-                        <a:t>정의, 사용 이유, 응용 사례</a:t>
+                        <a:t>머신러닝이란, 사용 이유, 애플리케이션 사례</a:t>
+                      </a:r>
+                    </a:p>
+                  </a:txBody>
+                  <a:tcPr marL="101600" marR="101600" marT="101600" marB="101600" anchor="ctr">
+                    <a:solidFill>
+                      <a:srgbClr val="FFFFFF"/>
+                    </a:solidFill>
+                    <a:lnL w="0">
+                      <a:noFill/>
+                    </a:lnL>
+                    <a:lnR w="0">
+                      <a:noFill/>
+                    </a:lnR>
+                    <a:lnT w="0">
+                      <a:noFill/>
+                    </a:lnT>
+                    <a:lnB w="9525">
+                      <a:solidFill>
+                        <a:srgbClr val="E2E2E2"/>
+                      </a:solidFill>
+                    </a:lnB>
+                  </a:tcPr>
+                </a:tc>
+                <a:tc>
+                  <a:txBody>
+                    <a:bodyPr/>
+                    <a:lstStyle/>
+                    <a:p>
+                      <a:r>
+                        <a:rPr sz="1300" b="0">
+                          <a:solidFill>
+                            <a:srgbClr val="5E5E5E"/>
+                          </a:solidFill>
+                          <a:latin typeface="Pretendard Medium"/>
+                        </a:rPr>
+                        <a:t>28</a:t>
                       </a:r>
                     </a:p>
                   </a:txBody>
@@ -8771,7 +10753,43 @@
                           </a:solidFill>
                           <a:latin typeface="Pretendard Medium"/>
                         </a:rPr>
-                        <a:t>시스템의 종류 — 세 축</a:t>
+                        <a:t>머신러닝 시스템의 종류</a:t>
+                      </a:r>
+                    </a:p>
+                  </a:txBody>
+                  <a:tcPr marL="101600" marR="101600" marT="101600" marB="101600" anchor="ctr">
+                    <a:solidFill>
+                      <a:srgbClr val="FFFFFF"/>
+                    </a:solidFill>
+                    <a:lnL w="0">
+                      <a:noFill/>
+                    </a:lnL>
+                    <a:lnR w="0">
+                      <a:noFill/>
+                    </a:lnR>
+                    <a:lnT w="0">
+                      <a:noFill/>
+                    </a:lnT>
+                    <a:lnB w="9525">
+                      <a:solidFill>
+                        <a:srgbClr val="E2E2E2"/>
+                      </a:solidFill>
+                    </a:lnB>
+                  </a:tcPr>
+                </a:tc>
+                <a:tc>
+                  <a:txBody>
+                    <a:bodyPr/>
+                    <a:lstStyle/>
+                    <a:p>
+                      <a:r>
+                        <a:rPr sz="1300" b="0">
+                          <a:solidFill>
+                            <a:srgbClr val="5E5E5E"/>
+                          </a:solidFill>
+                          <a:latin typeface="Pretendard Medium"/>
+                        </a:rPr>
+                        <a:t>34</a:t>
                       </a:r>
                     </a:p>
                   </a:txBody>
@@ -8845,7 +10863,43 @@
                           </a:solidFill>
                           <a:latin typeface="Pretendard Medium"/>
                         </a:rPr>
-                        <a:t>주요 도전 과제</a:t>
+                        <a:t>머신러닝의 주요 도전 과제</a:t>
+                      </a:r>
+                    </a:p>
+                  </a:txBody>
+                  <a:tcPr marL="101600" marR="101600" marT="101600" marB="101600" anchor="ctr">
+                    <a:solidFill>
+                      <a:srgbClr val="FFFFFF"/>
+                    </a:solidFill>
+                    <a:lnL w="0">
+                      <a:noFill/>
+                    </a:lnL>
+                    <a:lnR w="0">
+                      <a:noFill/>
+                    </a:lnR>
+                    <a:lnT w="0">
+                      <a:noFill/>
+                    </a:lnT>
+                    <a:lnB w="9525">
+                      <a:solidFill>
+                        <a:srgbClr val="E2E2E2"/>
+                      </a:solidFill>
+                    </a:lnB>
+                  </a:tcPr>
+                </a:tc>
+                <a:tc>
+                  <a:txBody>
+                    <a:bodyPr/>
+                    <a:lstStyle/>
+                    <a:p>
+                      <a:r>
+                        <a:rPr sz="1300" b="0">
+                          <a:solidFill>
+                            <a:srgbClr val="5E5E5E"/>
+                          </a:solidFill>
+                          <a:latin typeface="Pretendard Medium"/>
+                        </a:rPr>
+                        <a:t>54</a:t>
                       </a:r>
                     </a:p>
                   </a:txBody>
@@ -8943,6 +10997,152 @@
                     </a:lnB>
                   </a:tcPr>
                 </a:tc>
+                <a:tc>
+                  <a:txBody>
+                    <a:bodyPr/>
+                    <a:lstStyle/>
+                    <a:p>
+                      <a:r>
+                        <a:rPr sz="1300" b="0">
+                          <a:solidFill>
+                            <a:srgbClr val="5E5E5E"/>
+                          </a:solidFill>
+                          <a:latin typeface="Pretendard Medium"/>
+                        </a:rPr>
+                        <a:t>62</a:t>
+                      </a:r>
+                    </a:p>
+                  </a:txBody>
+                  <a:tcPr marL="101600" marR="101600" marT="101600" marB="101600" anchor="ctr">
+                    <a:solidFill>
+                      <a:srgbClr val="FFFFFF"/>
+                    </a:solidFill>
+                    <a:lnL w="0">
+                      <a:noFill/>
+                    </a:lnL>
+                    <a:lnR w="0">
+                      <a:noFill/>
+                    </a:lnR>
+                    <a:lnT w="0">
+                      <a:noFill/>
+                    </a:lnT>
+                    <a:lnB w="9525">
+                      <a:solidFill>
+                        <a:srgbClr val="E2E2E2"/>
+                      </a:solidFill>
+                    </a:lnB>
+                  </a:tcPr>
+                </a:tc>
+              </a:tr>
+              <a:tr h="635000">
+                <a:tc>
+                  <a:txBody>
+                    <a:bodyPr/>
+                    <a:lstStyle/>
+                    <a:p>
+                      <a:r>
+                        <a:rPr sz="1300" b="1">
+                          <a:solidFill>
+                            <a:srgbClr val="000000"/>
+                          </a:solidFill>
+                          <a:latin typeface="Pretendard"/>
+                        </a:rPr>
+                        <a:t>—</a:t>
+                      </a:r>
+                    </a:p>
+                  </a:txBody>
+                  <a:tcPr marL="101600" marR="101600" marT="101600" marB="101600" anchor="ctr">
+                    <a:solidFill>
+                      <a:srgbClr val="FFFFFF"/>
+                    </a:solidFill>
+                    <a:lnL w="0">
+                      <a:noFill/>
+                    </a:lnL>
+                    <a:lnR w="0">
+                      <a:noFill/>
+                    </a:lnR>
+                    <a:lnT w="0">
+                      <a:noFill/>
+                    </a:lnT>
+                    <a:lnB w="9525">
+                      <a:solidFill>
+                        <a:srgbClr val="E2E2E2"/>
+                      </a:solidFill>
+                    </a:lnB>
+                  </a:tcPr>
+                </a:tc>
+                <a:tc>
+                  <a:txBody>
+                    <a:bodyPr/>
+                    <a:lstStyle/>
+                    <a:p>
+                      <a:r>
+                        <a:rPr sz="1300" b="0">
+                          <a:solidFill>
+                            <a:srgbClr val="5E5E5E"/>
+                          </a:solidFill>
+                          <a:latin typeface="Pretendard Medium"/>
+                        </a:rPr>
+                        <a:t>연습문제 (수업에서 다루지 않음)</a:t>
+                      </a:r>
+                    </a:p>
+                  </a:txBody>
+                  <a:tcPr marL="101600" marR="101600" marT="101600" marB="101600" anchor="ctr">
+                    <a:solidFill>
+                      <a:srgbClr val="FFFFFF"/>
+                    </a:solidFill>
+                    <a:lnL w="0">
+                      <a:noFill/>
+                    </a:lnL>
+                    <a:lnR w="0">
+                      <a:noFill/>
+                    </a:lnR>
+                    <a:lnT w="0">
+                      <a:noFill/>
+                    </a:lnT>
+                    <a:lnB w="9525">
+                      <a:solidFill>
+                        <a:srgbClr val="E2E2E2"/>
+                      </a:solidFill>
+                    </a:lnB>
+                  </a:tcPr>
+                </a:tc>
+                <a:tc>
+                  <a:txBody>
+                    <a:bodyPr/>
+                    <a:lstStyle/>
+                    <a:p>
+                      <a:r>
+                        <a:rPr sz="1300" b="0">
+                          <a:solidFill>
+                            <a:srgbClr val="5E5E5E"/>
+                          </a:solidFill>
+                          <a:latin typeface="Pretendard Medium"/>
+                        </a:rPr>
+                        <a:t>66</a:t>
+                      </a:r>
+                    </a:p>
+                  </a:txBody>
+                  <a:tcPr marL="101600" marR="101600" marT="101600" marB="101600" anchor="ctr">
+                    <a:solidFill>
+                      <a:srgbClr val="FFFFFF"/>
+                    </a:solidFill>
+                    <a:lnL w="0">
+                      <a:noFill/>
+                    </a:lnL>
+                    <a:lnR w="0">
+                      <a:noFill/>
+                    </a:lnR>
+                    <a:lnT w="0">
+                      <a:noFill/>
+                    </a:lnT>
+                    <a:lnB w="9525">
+                      <a:solidFill>
+                        <a:srgbClr val="E2E2E2"/>
+                      </a:solidFill>
+                    </a:lnB>
+                  </a:tcPr>
+                </a:tc>
               </a:tr>
             </a:tbl>
           </a:graphicData>
@@ -8990,7 +11190,7 @@
             <a:pPr algn="r"/>
             <a:fld id="{F7021451-1387-4CA6-816F-3879F97B5CBC}" type="slidenum">
               <a:rPr b="0" lang="en-US"/>
-              <a:t>1008</a:t>
+              <a:t>1007</a:t>
             </a:fld>
             <a:endParaRPr lang="en-US"/>
           </a:p>
@@ -9051,7 +11251,7 @@
           <a:lstStyle/>
           <a:p>
             <a:r>
-              <a:t>1. 머신러닝이란</a:t>
+              <a:t>1. 머신러닝의 정의와 사용 이유</a:t>
             </a:r>
           </a:p>
         </p:txBody>
@@ -9073,25 +11273,43 @@
           <a:p>
             <a:pPr/>
             <a:r>
-              <a:t>데이터에서 학습하도록 컴퓨터를 프로그래밍하는 방법</a:t>
+              <a:rPr b="1">
+                <a:latin typeface="Pretendard"/>
+              </a:rPr>
+              <a:t>새뮤얼(1959)</a:t>
+            </a:r>
+            <a:r>
+              <a:t> — 명시적인 프로그래밍 없이 학습하는 능력을 갖추게 하는 연구 분야</a:t>
             </a:r>
           </a:p>
           <a:p>
             <a:pPr/>
             <a:r>
-              <a:t>미첼(1997) — 경험 E로 작업 T의 성능 P가 향상되면 학습</a:t>
+              <a:rPr b="1">
+                <a:latin typeface="Pretendard"/>
+              </a:rPr>
+              <a:t>미첼(1997)</a:t>
+            </a:r>
+            <a:r>
+              <a:t> — 작업 T, 성능 측정 P, 경험 E</a:t>
             </a:r>
           </a:p>
           <a:p>
             <a:pPr lvl="1"/>
             <a:r>
-              <a:t>예: T 도착시간 예측, E 과거 운행 기록, P 평균 오차</a:t>
+              <a:t>경험 E로 작업 T의 성능 P가 향상되면 학습</a:t>
             </a:r>
           </a:p>
           <a:p>
             <a:pPr/>
             <a:r>
-              <a:t>데이터 보유와 학습은 다름 — 기준은 성능 P의 향상</a:t>
+              <a:t>스팸 필터 — T 스팸 구분, E 훈련 데이터, P 정확도</a:t>
+            </a:r>
+          </a:p>
+          <a:p>
+            <a:pPr/>
+            <a:r>
+              <a:t>데이터를 모으는 것은 학습이 아님 — 위키백과 내려받기</a:t>
             </a:r>
           </a:p>
         </p:txBody>
@@ -9178,7 +11396,7 @@
           <a:lstStyle/>
           <a:p>
             <a:r>
-              <a:t>1.3 규칙 기반의 한계</a:t>
+              <a:t>1.3 머신러닝을 사용하는 이유</a:t>
             </a:r>
           </a:p>
         </p:txBody>
@@ -9199,7 +11417,7 @@
           <a:lstStyle/>
           <a:p>
             <a:r>
-              <a:t>1. 머신러닝이란</a:t>
+              <a:t>1. 머신러닝의 정의와 사용 이유</a:t>
             </a:r>
           </a:p>
         </p:txBody>
@@ -9221,29 +11439,517 @@
           <a:p>
             <a:pPr/>
             <a:r>
-              <a:t>규칙 기반: 사람이 조건을 나열 — 조건이 늘수록 유지보수 비용 증가</a:t>
-            </a:r>
-          </a:p>
-          <a:p>
-            <a:pPr lvl="1"/>
-            <a:r>
-              <a:t>시간대 평균 → 요일 추가 → 도로 등급 추가 → 강우 추가</a:t>
+              <a:t>규칙을 사람이 작성</a:t>
             </a:r>
           </a:p>
           <a:p>
             <a:pPr/>
             <a:r>
-              <a:t>머신러닝: 패턴을 데이터에서 찾고 새 데이터에 적응</a:t>
+              <a:t>조건이 늘수록 유지 부담</a:t>
             </a:r>
           </a:p>
           <a:p>
             <a:pPr/>
             <a:r>
-              <a:t>규칙 작성 루프가 데이터·훈련·평가 루프로 대체</a:t>
-            </a:r>
-          </a:p>
-        </p:txBody>
-      </p:sp>
+              <a:t>규칙을 데이터에서 학습</a:t>
+            </a:r>
+          </a:p>
+          <a:p>
+            <a:pPr/>
+            <a:r>
+              <a:t>자동으로 변화에 적응</a:t>
+            </a:r>
+          </a:p>
+          <a:p>
+            <a:pPr/>
+            <a:r>
+              <a:t>데이터 마이닝으로 이해</a:t>
+            </a:r>
+          </a:p>
+        </p:txBody>
+      </p:sp>
+      <p:sp>
+        <p:nvSpPr>
+          <p:cNvPr id="5" name="Text Placeholder 4"/>
+          <p:cNvSpPr>
+            <a:spLocks noGrp="1"/>
+          </p:cNvSpPr>
+          <p:nvPr>
+            <p:ph type="body" idx="103"/>
+          </p:nvPr>
+        </p:nvSpPr>
+        <p:spPr/>
+        <p:txBody>
+          <a:bodyPr/>
+          <a:lstStyle/>
+          <a:p>
+            <a:r>
+              <a:t>표 2. 스팸 필터의 두 접근법 (교재 그림 1-1·1-2)</a:t>
+            </a:r>
+          </a:p>
+        </p:txBody>
+      </p:sp>
+      <p:graphicFrame>
+        <p:nvGraphicFramePr>
+          <p:cNvPr id="6" name="Table Placeholder 5"/>
+          <p:cNvGraphicFramePr>
+            <a:graphicFrameLocks noGrp="1"/>
+          </p:cNvGraphicFramePr>
+          <p:nvPr>
+            <p:ph type="tbl" idx="104"/>
+          </p:nvPr>
+        </p:nvGraphicFramePr>
+        <p:xfrm>
+          <a:off x="4937760" y="1828800"/>
+          <a:ext cx="6565392" cy="2311400"/>
+        </p:xfrm>
+        <a:graphic>
+          <a:graphicData uri="http://schemas.openxmlformats.org/drawingml/2006/table">
+            <a:tbl>
+              <a:tblPr firstRow="0" bandRow="0" firstCol="0" lastRow="0" lastCol="0" bandCol="0"/>
+              <a:tblGrid>
+                <a:gridCol w="2188464"/>
+                <a:gridCol w="2188464"/>
+                <a:gridCol w="2188464"/>
+              </a:tblGrid>
+              <a:tr h="406400">
+                <a:tc>
+                  <a:txBody>
+                    <a:bodyPr/>
+                    <a:lstStyle/>
+                    <a:p>
+                      <a:r>
+                        <a:rPr sz="1300" b="0">
+                          <a:solidFill>
+                            <a:srgbClr val="FFFFFF"/>
+                          </a:solidFill>
+                          <a:latin typeface="Pretendard Medium"/>
+                        </a:rPr>
+                        <a:t>항목</a:t>
+                      </a:r>
+                    </a:p>
+                  </a:txBody>
+                  <a:tcPr marL="101600" marR="101600" marT="76200" marB="76200" anchor="ctr">
+                    <a:solidFill>
+                      <a:srgbClr val="000000"/>
+                    </a:solidFill>
+                    <a:lnL w="0">
+                      <a:noFill/>
+                    </a:lnL>
+                    <a:lnR w="0">
+                      <a:noFill/>
+                    </a:lnR>
+                    <a:lnT w="0">
+                      <a:noFill/>
+                    </a:lnT>
+                    <a:lnB w="0">
+                      <a:noFill/>
+                    </a:lnB>
+                  </a:tcPr>
+                </a:tc>
+                <a:tc>
+                  <a:txBody>
+                    <a:bodyPr/>
+                    <a:lstStyle/>
+                    <a:p>
+                      <a:r>
+                        <a:rPr sz="1300" b="0">
+                          <a:solidFill>
+                            <a:srgbClr val="FFFFFF"/>
+                          </a:solidFill>
+                          <a:latin typeface="Pretendard Medium"/>
+                        </a:rPr>
+                        <a:t>전통적 접근법</a:t>
+                      </a:r>
+                    </a:p>
+                  </a:txBody>
+                  <a:tcPr marL="101600" marR="101600" marT="76200" marB="76200" anchor="ctr">
+                    <a:solidFill>
+                      <a:srgbClr val="000000"/>
+                    </a:solidFill>
+                    <a:lnL w="0">
+                      <a:noFill/>
+                    </a:lnL>
+                    <a:lnR w="0">
+                      <a:noFill/>
+                    </a:lnR>
+                    <a:lnT w="0">
+                      <a:noFill/>
+                    </a:lnT>
+                    <a:lnB w="0">
+                      <a:noFill/>
+                    </a:lnB>
+                  </a:tcPr>
+                </a:tc>
+                <a:tc>
+                  <a:txBody>
+                    <a:bodyPr/>
+                    <a:lstStyle/>
+                    <a:p>
+                      <a:r>
+                        <a:rPr sz="1300" b="0">
+                          <a:solidFill>
+                            <a:srgbClr val="FFFFFF"/>
+                          </a:solidFill>
+                          <a:latin typeface="Pretendard Medium"/>
+                        </a:rPr>
+                        <a:t>머신러닝 접근법</a:t>
+                      </a:r>
+                    </a:p>
+                  </a:txBody>
+                  <a:tcPr marL="101600" marR="101600" marT="76200" marB="76200" anchor="ctr">
+                    <a:solidFill>
+                      <a:srgbClr val="000000"/>
+                    </a:solidFill>
+                    <a:lnL w="0">
+                      <a:noFill/>
+                    </a:lnL>
+                    <a:lnR w="0">
+                      <a:noFill/>
+                    </a:lnR>
+                    <a:lnT w="0">
+                      <a:noFill/>
+                    </a:lnT>
+                    <a:lnB w="0">
+                      <a:noFill/>
+                    </a:lnB>
+                  </a:tcPr>
+                </a:tc>
+              </a:tr>
+              <a:tr h="635000">
+                <a:tc>
+                  <a:txBody>
+                    <a:bodyPr/>
+                    <a:lstStyle/>
+                    <a:p>
+                      <a:r>
+                        <a:rPr sz="1300" b="1">
+                          <a:solidFill>
+                            <a:srgbClr val="000000"/>
+                          </a:solidFill>
+                          <a:latin typeface="Pretendard"/>
+                        </a:rPr>
+                        <a:t>규칙</a:t>
+                      </a:r>
+                    </a:p>
+                  </a:txBody>
+                  <a:tcPr marL="101600" marR="101600" marT="101600" marB="101600" anchor="ctr">
+                    <a:solidFill>
+                      <a:srgbClr val="FFFFFF"/>
+                    </a:solidFill>
+                    <a:lnL w="0">
+                      <a:noFill/>
+                    </a:lnL>
+                    <a:lnR w="0">
+                      <a:noFill/>
+                    </a:lnR>
+                    <a:lnT w="0">
+                      <a:noFill/>
+                    </a:lnT>
+                    <a:lnB w="9525">
+                      <a:solidFill>
+                        <a:srgbClr val="E2E2E2"/>
+                      </a:solidFill>
+                    </a:lnB>
+                  </a:tcPr>
+                </a:tc>
+                <a:tc>
+                  <a:txBody>
+                    <a:bodyPr/>
+                    <a:lstStyle/>
+                    <a:p>
+                      <a:r>
+                        <a:rPr sz="1300" b="0">
+                          <a:solidFill>
+                            <a:srgbClr val="5E5E5E"/>
+                          </a:solidFill>
+                          <a:latin typeface="Pretendard Medium"/>
+                        </a:rPr>
+                        <a:t>사람이 작성</a:t>
+                      </a:r>
+                    </a:p>
+                  </a:txBody>
+                  <a:tcPr marL="101600" marR="101600" marT="101600" marB="101600" anchor="ctr">
+                    <a:solidFill>
+                      <a:srgbClr val="FFFFFF"/>
+                    </a:solidFill>
+                    <a:lnL w="0">
+                      <a:noFill/>
+                    </a:lnL>
+                    <a:lnR w="0">
+                      <a:noFill/>
+                    </a:lnR>
+                    <a:lnT w="0">
+                      <a:noFill/>
+                    </a:lnT>
+                    <a:lnB w="9525">
+                      <a:solidFill>
+                        <a:srgbClr val="E2E2E2"/>
+                      </a:solidFill>
+                    </a:lnB>
+                  </a:tcPr>
+                </a:tc>
+                <a:tc>
+                  <a:txBody>
+                    <a:bodyPr/>
+                    <a:lstStyle/>
+                    <a:p>
+                      <a:r>
+                        <a:rPr sz="1300" b="0">
+                          <a:solidFill>
+                            <a:srgbClr val="5E5E5E"/>
+                          </a:solidFill>
+                          <a:latin typeface="Pretendard Medium"/>
+                        </a:rPr>
+                        <a:t>알고리즘이 학습</a:t>
+                      </a:r>
+                    </a:p>
+                  </a:txBody>
+                  <a:tcPr marL="101600" marR="101600" marT="101600" marB="101600" anchor="ctr">
+                    <a:solidFill>
+                      <a:srgbClr val="FFFFFF"/>
+                    </a:solidFill>
+                    <a:lnL w="0">
+                      <a:noFill/>
+                    </a:lnL>
+                    <a:lnR w="0">
+                      <a:noFill/>
+                    </a:lnR>
+                    <a:lnT w="0">
+                      <a:noFill/>
+                    </a:lnT>
+                    <a:lnB w="9525">
+                      <a:solidFill>
+                        <a:srgbClr val="E2E2E2"/>
+                      </a:solidFill>
+                    </a:lnB>
+                  </a:tcPr>
+                </a:tc>
+              </a:tr>
+              <a:tr h="635000">
+                <a:tc>
+                  <a:txBody>
+                    <a:bodyPr/>
+                    <a:lstStyle/>
+                    <a:p>
+                      <a:r>
+                        <a:rPr sz="1300" b="1">
+                          <a:solidFill>
+                            <a:srgbClr val="000000"/>
+                          </a:solidFill>
+                          <a:latin typeface="Pretendard"/>
+                        </a:rPr>
+                        <a:t>변경</a:t>
+                      </a:r>
+                    </a:p>
+                  </a:txBody>
+                  <a:tcPr marL="101600" marR="101600" marT="101600" marB="101600" anchor="ctr">
+                    <a:solidFill>
+                      <a:srgbClr val="FFFFFF"/>
+                    </a:solidFill>
+                    <a:lnL w="0">
+                      <a:noFill/>
+                    </a:lnL>
+                    <a:lnR w="0">
+                      <a:noFill/>
+                    </a:lnR>
+                    <a:lnT w="0">
+                      <a:noFill/>
+                    </a:lnT>
+                    <a:lnB w="9525">
+                      <a:solidFill>
+                        <a:srgbClr val="E2E2E2"/>
+                      </a:solidFill>
+                    </a:lnB>
+                  </a:tcPr>
+                </a:tc>
+                <a:tc>
+                  <a:txBody>
+                    <a:bodyPr/>
+                    <a:lstStyle/>
+                    <a:p>
+                      <a:r>
+                        <a:rPr sz="1300" b="0">
+                          <a:solidFill>
+                            <a:srgbClr val="5E5E5E"/>
+                          </a:solidFill>
+                          <a:latin typeface="Pretendard Medium"/>
+                        </a:rPr>
+                        <a:t>규칙 수정 후 재배포</a:t>
+                      </a:r>
+                    </a:p>
+                  </a:txBody>
+                  <a:tcPr marL="101600" marR="101600" marT="101600" marB="101600" anchor="ctr">
+                    <a:solidFill>
+                      <a:srgbClr val="FFFFFF"/>
+                    </a:solidFill>
+                    <a:lnL w="0">
+                      <a:noFill/>
+                    </a:lnL>
+                    <a:lnR w="0">
+                      <a:noFill/>
+                    </a:lnR>
+                    <a:lnT w="0">
+                      <a:noFill/>
+                    </a:lnT>
+                    <a:lnB w="9525">
+                      <a:solidFill>
+                        <a:srgbClr val="E2E2E2"/>
+                      </a:solidFill>
+                    </a:lnB>
+                  </a:tcPr>
+                </a:tc>
+                <a:tc>
+                  <a:txBody>
+                    <a:bodyPr/>
+                    <a:lstStyle/>
+                    <a:p>
+                      <a:r>
+                        <a:rPr sz="1300" b="0">
+                          <a:solidFill>
+                            <a:srgbClr val="5E5E5E"/>
+                          </a:solidFill>
+                          <a:latin typeface="Pretendard Medium"/>
+                        </a:rPr>
+                        <a:t>새 데이터로 재훈련</a:t>
+                      </a:r>
+                    </a:p>
+                  </a:txBody>
+                  <a:tcPr marL="101600" marR="101600" marT="101600" marB="101600" anchor="ctr">
+                    <a:solidFill>
+                      <a:srgbClr val="FFFFFF"/>
+                    </a:solidFill>
+                    <a:lnL w="0">
+                      <a:noFill/>
+                    </a:lnL>
+                    <a:lnR w="0">
+                      <a:noFill/>
+                    </a:lnR>
+                    <a:lnT w="0">
+                      <a:noFill/>
+                    </a:lnT>
+                    <a:lnB w="9525">
+                      <a:solidFill>
+                        <a:srgbClr val="E2E2E2"/>
+                      </a:solidFill>
+                    </a:lnB>
+                  </a:tcPr>
+                </a:tc>
+              </a:tr>
+              <a:tr h="635000">
+                <a:tc>
+                  <a:txBody>
+                    <a:bodyPr/>
+                    <a:lstStyle/>
+                    <a:p>
+                      <a:r>
+                        <a:rPr sz="1300" b="1">
+                          <a:solidFill>
+                            <a:srgbClr val="000000"/>
+                          </a:solidFill>
+                          <a:latin typeface="Pretendard"/>
+                        </a:rPr>
+                        <a:t>결과</a:t>
+                      </a:r>
+                    </a:p>
+                  </a:txBody>
+                  <a:tcPr marL="101600" marR="101600" marT="101600" marB="101600" anchor="ctr">
+                    <a:solidFill>
+                      <a:srgbClr val="FFFFFF"/>
+                    </a:solidFill>
+                    <a:lnL w="0">
+                      <a:noFill/>
+                    </a:lnL>
+                    <a:lnR w="0">
+                      <a:noFill/>
+                    </a:lnR>
+                    <a:lnT w="0">
+                      <a:noFill/>
+                    </a:lnT>
+                    <a:lnB w="9525">
+                      <a:solidFill>
+                        <a:srgbClr val="E2E2E2"/>
+                      </a:solidFill>
+                    </a:lnB>
+                  </a:tcPr>
+                </a:tc>
+                <a:tc>
+                  <a:txBody>
+                    <a:bodyPr/>
+                    <a:lstStyle/>
+                    <a:p>
+                      <a:r>
+                        <a:rPr sz="1300" b="0">
+                          <a:solidFill>
+                            <a:srgbClr val="5E5E5E"/>
+                          </a:solidFill>
+                          <a:latin typeface="Pretendard Medium"/>
+                        </a:rPr>
+                        <a:t>규칙이 길고 복잡</a:t>
+                      </a:r>
+                    </a:p>
+                  </a:txBody>
+                  <a:tcPr marL="101600" marR="101600" marT="101600" marB="101600" anchor="ctr">
+                    <a:solidFill>
+                      <a:srgbClr val="FFFFFF"/>
+                    </a:solidFill>
+                    <a:lnL w="0">
+                      <a:noFill/>
+                    </a:lnL>
+                    <a:lnR w="0">
+                      <a:noFill/>
+                    </a:lnR>
+                    <a:lnT w="0">
+                      <a:noFill/>
+                    </a:lnT>
+                    <a:lnB w="9525">
+                      <a:solidFill>
+                        <a:srgbClr val="E2E2E2"/>
+                      </a:solidFill>
+                    </a:lnB>
+                  </a:tcPr>
+                </a:tc>
+                <a:tc>
+                  <a:txBody>
+                    <a:bodyPr/>
+                    <a:lstStyle/>
+                    <a:p>
+                      <a:r>
+                        <a:rPr sz="1300" b="0">
+                          <a:solidFill>
+                            <a:srgbClr val="5E5E5E"/>
+                          </a:solidFill>
+                          <a:latin typeface="Pretendard Medium"/>
+                        </a:rPr>
+                        <a:t>프로그램이 짧아짐</a:t>
+                      </a:r>
+                    </a:p>
+                  </a:txBody>
+                  <a:tcPr marL="101600" marR="101600" marT="101600" marB="101600" anchor="ctr">
+                    <a:solidFill>
+                      <a:srgbClr val="FFFFFF"/>
+                    </a:solidFill>
+                    <a:lnL w="0">
+                      <a:noFill/>
+                    </a:lnL>
+                    <a:lnR w="0">
+                      <a:noFill/>
+                    </a:lnR>
+                    <a:lnT w="0">
+                      <a:noFill/>
+                    </a:lnT>
+                    <a:lnB w="9525">
+                      <a:solidFill>
+                        <a:srgbClr val="E2E2E2"/>
+                      </a:solidFill>
+                    </a:lnB>
+                  </a:tcPr>
+                </a:tc>
+              </a:tr>
+            </a:tbl>
+          </a:graphicData>
+        </a:graphic>
+      </p:graphicFrame>
       <p:sp>
         <p:nvSpPr>
           <p:cNvPr id="25" name="Slide Number Placeholder 0"/>
@@ -9286,7 +11992,7 @@
             <a:pPr algn="r"/>
             <a:fld id="{F7021451-1387-4CA6-816F-3879F97B5CBC}" type="slidenum">
               <a:rPr b="0" lang="en-US"/>
-              <a:t>1004</a:t>
+              <a:t>1008</a:t>
             </a:fld>
             <a:endParaRPr lang="en-US"/>
           </a:p>
@@ -9326,7 +12032,7 @@
           <a:lstStyle/>
           <a:p>
             <a:r>
-              <a:t>1.4 머신러닝이 유리한 경우</a:t>
+              <a:t>1.4 애플리케이션 사례</a:t>
             </a:r>
           </a:p>
         </p:txBody>
@@ -9347,7 +12053,7 @@
           <a:lstStyle/>
           <a:p>
             <a:r>
-              <a:t>1. 머신러닝이란</a:t>
+              <a:t>1. 머신러닝의 정의와 사용 이유</a:t>
             </a:r>
           </a:p>
         </p:txBody>
@@ -9367,31 +12073,693 @@
           <a:bodyPr/>
           <a:lstStyle/>
           <a:p>
-            <a:pPr/>
-            <a:r>
-              <a:t>규칙이 길고 계속 늘어나는 문제</a:t>
-            </a:r>
-          </a:p>
-          <a:p>
-            <a:pPr/>
-            <a:r>
-              <a:t>규칙으로는 풀기 어려운 문제 — 음성 인식</a:t>
-            </a:r>
-          </a:p>
-          <a:p>
-            <a:pPr/>
-            <a:r>
-              <a:t>환경이 계속 변하는 문제 — 재훈련으로 적응</a:t>
-            </a:r>
-          </a:p>
-          <a:p>
-            <a:pPr/>
-            <a:r>
-              <a:t>대량 데이터에서 통찰을 얻는 문제 — 데이터 마이닝</a:t>
-            </a:r>
-          </a:p>
-        </p:txBody>
-      </p:sp>
+            <a:r>
+              <a:t>표 3. 교재의 작업 유형과 모빌리티 대응</a:t>
+            </a:r>
+          </a:p>
+        </p:txBody>
+      </p:sp>
+      <p:graphicFrame>
+        <p:nvGraphicFramePr>
+          <p:cNvPr id="5" name="Table Placeholder 4"/>
+          <p:cNvGraphicFramePr>
+            <a:graphicFrameLocks noGrp="1"/>
+          </p:cNvGraphicFramePr>
+          <p:nvPr>
+            <p:ph type="tbl" idx="103"/>
+          </p:nvPr>
+        </p:nvGraphicFramePr>
+        <p:xfrm>
+          <a:off x="685800" y="1828800"/>
+          <a:ext cx="10820095" cy="3581400"/>
+        </p:xfrm>
+        <a:graphic>
+          <a:graphicData uri="http://schemas.openxmlformats.org/drawingml/2006/table">
+            <a:tbl>
+              <a:tblPr firstRow="0" bandRow="0" firstCol="0" lastRow="0" lastCol="0" bandCol="0"/>
+              <a:tblGrid>
+                <a:gridCol w="3606698"/>
+                <a:gridCol w="3606698"/>
+                <a:gridCol w="3606699"/>
+              </a:tblGrid>
+              <a:tr h="406400">
+                <a:tc>
+                  <a:txBody>
+                    <a:bodyPr/>
+                    <a:lstStyle/>
+                    <a:p>
+                      <a:r>
+                        <a:rPr sz="1300" b="0">
+                          <a:solidFill>
+                            <a:srgbClr val="FFFFFF"/>
+                          </a:solidFill>
+                          <a:latin typeface="Pretendard Medium"/>
+                        </a:rPr>
+                        <a:t>교재 사례</a:t>
+                      </a:r>
+                    </a:p>
+                  </a:txBody>
+                  <a:tcPr marL="101600" marR="101600" marT="76200" marB="76200" anchor="ctr">
+                    <a:solidFill>
+                      <a:srgbClr val="000000"/>
+                    </a:solidFill>
+                    <a:lnL w="0">
+                      <a:noFill/>
+                    </a:lnL>
+                    <a:lnR w="0">
+                      <a:noFill/>
+                    </a:lnR>
+                    <a:lnT w="0">
+                      <a:noFill/>
+                    </a:lnT>
+                    <a:lnB w="0">
+                      <a:noFill/>
+                    </a:lnB>
+                  </a:tcPr>
+                </a:tc>
+                <a:tc>
+                  <a:txBody>
+                    <a:bodyPr/>
+                    <a:lstStyle/>
+                    <a:p>
+                      <a:r>
+                        <a:rPr sz="1300" b="0">
+                          <a:solidFill>
+                            <a:srgbClr val="FFFFFF"/>
+                          </a:solidFill>
+                          <a:latin typeface="Pretendard Medium"/>
+                        </a:rPr>
+                        <a:t>작업 유형</a:t>
+                      </a:r>
+                    </a:p>
+                  </a:txBody>
+                  <a:tcPr marL="101600" marR="101600" marT="76200" marB="76200" anchor="ctr">
+                    <a:solidFill>
+                      <a:srgbClr val="000000"/>
+                    </a:solidFill>
+                    <a:lnL w="0">
+                      <a:noFill/>
+                    </a:lnL>
+                    <a:lnR w="0">
+                      <a:noFill/>
+                    </a:lnR>
+                    <a:lnT w="0">
+                      <a:noFill/>
+                    </a:lnT>
+                    <a:lnB w="0">
+                      <a:noFill/>
+                    </a:lnB>
+                  </a:tcPr>
+                </a:tc>
+                <a:tc>
+                  <a:txBody>
+                    <a:bodyPr/>
+                    <a:lstStyle/>
+                    <a:p>
+                      <a:r>
+                        <a:rPr sz="1300" b="0">
+                          <a:solidFill>
+                            <a:srgbClr val="FFFFFF"/>
+                          </a:solidFill>
+                          <a:latin typeface="Pretendard Medium"/>
+                        </a:rPr>
+                        <a:t>모빌리티 대응</a:t>
+                      </a:r>
+                    </a:p>
+                  </a:txBody>
+                  <a:tcPr marL="101600" marR="101600" marT="76200" marB="76200" anchor="ctr">
+                    <a:solidFill>
+                      <a:srgbClr val="000000"/>
+                    </a:solidFill>
+                    <a:lnL w="0">
+                      <a:noFill/>
+                    </a:lnL>
+                    <a:lnR w="0">
+                      <a:noFill/>
+                    </a:lnR>
+                    <a:lnT w="0">
+                      <a:noFill/>
+                    </a:lnT>
+                    <a:lnB w="0">
+                      <a:noFill/>
+                    </a:lnB>
+                  </a:tcPr>
+                </a:tc>
+              </a:tr>
+              <a:tr h="635000">
+                <a:tc>
+                  <a:txBody>
+                    <a:bodyPr/>
+                    <a:lstStyle/>
+                    <a:p>
+                      <a:r>
+                        <a:rPr sz="1300" b="1">
+                          <a:solidFill>
+                            <a:srgbClr val="000000"/>
+                          </a:solidFill>
+                          <a:latin typeface="Pretendard"/>
+                        </a:rPr>
+                        <a:t>생산 라인 제품 이미지 분류</a:t>
+                      </a:r>
+                    </a:p>
+                  </a:txBody>
+                  <a:tcPr marL="101600" marR="101600" marT="101600" marB="101600" anchor="ctr">
+                    <a:solidFill>
+                      <a:srgbClr val="FFFFFF"/>
+                    </a:solidFill>
+                    <a:lnL w="0">
+                      <a:noFill/>
+                    </a:lnL>
+                    <a:lnR w="0">
+                      <a:noFill/>
+                    </a:lnR>
+                    <a:lnT w="0">
+                      <a:noFill/>
+                    </a:lnT>
+                    <a:lnB w="9525">
+                      <a:solidFill>
+                        <a:srgbClr val="E2E2E2"/>
+                      </a:solidFill>
+                    </a:lnB>
+                  </a:tcPr>
+                </a:tc>
+                <a:tc>
+                  <a:txBody>
+                    <a:bodyPr/>
+                    <a:lstStyle/>
+                    <a:p>
+                      <a:r>
+                        <a:rPr sz="1300" b="0">
+                          <a:solidFill>
+                            <a:srgbClr val="5E5E5E"/>
+                          </a:solidFill>
+                          <a:latin typeface="Pretendard Medium"/>
+                        </a:rPr>
+                        <a:t>이미지 분류</a:t>
+                      </a:r>
+                    </a:p>
+                  </a:txBody>
+                  <a:tcPr marL="101600" marR="101600" marT="101600" marB="101600" anchor="ctr">
+                    <a:solidFill>
+                      <a:srgbClr val="FFFFFF"/>
+                    </a:solidFill>
+                    <a:lnL w="0">
+                      <a:noFill/>
+                    </a:lnL>
+                    <a:lnR w="0">
+                      <a:noFill/>
+                    </a:lnR>
+                    <a:lnT w="0">
+                      <a:noFill/>
+                    </a:lnT>
+                    <a:lnB w="9525">
+                      <a:solidFill>
+                        <a:srgbClr val="E2E2E2"/>
+                      </a:solidFill>
+                    </a:lnB>
+                  </a:tcPr>
+                </a:tc>
+                <a:tc>
+                  <a:txBody>
+                    <a:bodyPr/>
+                    <a:lstStyle/>
+                    <a:p>
+                      <a:r>
+                        <a:rPr sz="1300" b="0">
+                          <a:solidFill>
+                            <a:srgbClr val="5E5E5E"/>
+                          </a:solidFill>
+                          <a:latin typeface="Pretendard Medium"/>
+                        </a:rPr>
+                        <a:t>도로 시설물 판별</a:t>
+                      </a:r>
+                    </a:p>
+                  </a:txBody>
+                  <a:tcPr marL="101600" marR="101600" marT="101600" marB="101600" anchor="ctr">
+                    <a:solidFill>
+                      <a:srgbClr val="FFFFFF"/>
+                    </a:solidFill>
+                    <a:lnL w="0">
+                      <a:noFill/>
+                    </a:lnL>
+                    <a:lnR w="0">
+                      <a:noFill/>
+                    </a:lnR>
+                    <a:lnT w="0">
+                      <a:noFill/>
+                    </a:lnT>
+                    <a:lnB w="9525">
+                      <a:solidFill>
+                        <a:srgbClr val="E2E2E2"/>
+                      </a:solidFill>
+                    </a:lnB>
+                  </a:tcPr>
+                </a:tc>
+              </a:tr>
+              <a:tr h="635000">
+                <a:tc>
+                  <a:txBody>
+                    <a:bodyPr/>
+                    <a:lstStyle/>
+                    <a:p>
+                      <a:r>
+                        <a:rPr sz="1300" b="1">
+                          <a:solidFill>
+                            <a:srgbClr val="000000"/>
+                          </a:solidFill>
+                          <a:latin typeface="Pretendard"/>
+                        </a:rPr>
+                        <a:t>내년도 수익 예측</a:t>
+                      </a:r>
+                    </a:p>
+                  </a:txBody>
+                  <a:tcPr marL="101600" marR="101600" marT="101600" marB="101600" anchor="ctr">
+                    <a:solidFill>
+                      <a:srgbClr val="FFFFFF"/>
+                    </a:solidFill>
+                    <a:lnL w="0">
+                      <a:noFill/>
+                    </a:lnL>
+                    <a:lnR w="0">
+                      <a:noFill/>
+                    </a:lnR>
+                    <a:lnT w="0">
+                      <a:noFill/>
+                    </a:lnT>
+                    <a:lnB w="9525">
+                      <a:solidFill>
+                        <a:srgbClr val="E2E2E2"/>
+                      </a:solidFill>
+                    </a:lnB>
+                  </a:tcPr>
+                </a:tc>
+                <a:tc>
+                  <a:txBody>
+                    <a:bodyPr/>
+                    <a:lstStyle/>
+                    <a:p>
+                      <a:r>
+                        <a:rPr sz="1300" b="0">
+                          <a:solidFill>
+                            <a:srgbClr val="5E5E5E"/>
+                          </a:solidFill>
+                          <a:latin typeface="Pretendard Medium"/>
+                        </a:rPr>
+                        <a:t>회귀</a:t>
+                      </a:r>
+                    </a:p>
+                  </a:txBody>
+                  <a:tcPr marL="101600" marR="101600" marT="101600" marB="101600" anchor="ctr">
+                    <a:solidFill>
+                      <a:srgbClr val="FFFFFF"/>
+                    </a:solidFill>
+                    <a:lnL w="0">
+                      <a:noFill/>
+                    </a:lnL>
+                    <a:lnR w="0">
+                      <a:noFill/>
+                    </a:lnR>
+                    <a:lnT w="0">
+                      <a:noFill/>
+                    </a:lnT>
+                    <a:lnB w="9525">
+                      <a:solidFill>
+                        <a:srgbClr val="E2E2E2"/>
+                      </a:solidFill>
+                    </a:lnB>
+                  </a:tcPr>
+                </a:tc>
+                <a:tc>
+                  <a:txBody>
+                    <a:bodyPr/>
+                    <a:lstStyle/>
+                    <a:p>
+                      <a:r>
+                        <a:rPr sz="1300" b="0">
+                          <a:solidFill>
+                            <a:srgbClr val="5E5E5E"/>
+                          </a:solidFill>
+                          <a:latin typeface="Pretendard Medium"/>
+                        </a:rPr>
+                        <a:t>통행시간·ETA 예측</a:t>
+                      </a:r>
+                    </a:p>
+                  </a:txBody>
+                  <a:tcPr marL="101600" marR="101600" marT="101600" marB="101600" anchor="ctr">
+                    <a:solidFill>
+                      <a:srgbClr val="FFFFFF"/>
+                    </a:solidFill>
+                    <a:lnL w="0">
+                      <a:noFill/>
+                    </a:lnL>
+                    <a:lnR w="0">
+                      <a:noFill/>
+                    </a:lnR>
+                    <a:lnT w="0">
+                      <a:noFill/>
+                    </a:lnT>
+                    <a:lnB w="9525">
+                      <a:solidFill>
+                        <a:srgbClr val="E2E2E2"/>
+                      </a:solidFill>
+                    </a:lnB>
+                  </a:tcPr>
+                </a:tc>
+              </a:tr>
+              <a:tr h="635000">
+                <a:tc>
+                  <a:txBody>
+                    <a:bodyPr/>
+                    <a:lstStyle/>
+                    <a:p>
+                      <a:r>
+                        <a:rPr sz="1300" b="1">
+                          <a:solidFill>
+                            <a:srgbClr val="000000"/>
+                          </a:solidFill>
+                          <a:latin typeface="Pretendard"/>
+                        </a:rPr>
+                        <a:t>고객 세분화</a:t>
+                      </a:r>
+                    </a:p>
+                  </a:txBody>
+                  <a:tcPr marL="101600" marR="101600" marT="101600" marB="101600" anchor="ctr">
+                    <a:solidFill>
+                      <a:srgbClr val="FFFFFF"/>
+                    </a:solidFill>
+                    <a:lnL w="0">
+                      <a:noFill/>
+                    </a:lnL>
+                    <a:lnR w="0">
+                      <a:noFill/>
+                    </a:lnR>
+                    <a:lnT w="0">
+                      <a:noFill/>
+                    </a:lnT>
+                    <a:lnB w="9525">
+                      <a:solidFill>
+                        <a:srgbClr val="E2E2E2"/>
+                      </a:solidFill>
+                    </a:lnB>
+                  </a:tcPr>
+                </a:tc>
+                <a:tc>
+                  <a:txBody>
+                    <a:bodyPr/>
+                    <a:lstStyle/>
+                    <a:p>
+                      <a:r>
+                        <a:rPr sz="1300" b="0">
+                          <a:solidFill>
+                            <a:srgbClr val="5E5E5E"/>
+                          </a:solidFill>
+                          <a:latin typeface="Pretendard Medium"/>
+                        </a:rPr>
+                        <a:t>군집</a:t>
+                      </a:r>
+                    </a:p>
+                  </a:txBody>
+                  <a:tcPr marL="101600" marR="101600" marT="101600" marB="101600" anchor="ctr">
+                    <a:solidFill>
+                      <a:srgbClr val="FFFFFF"/>
+                    </a:solidFill>
+                    <a:lnL w="0">
+                      <a:noFill/>
+                    </a:lnL>
+                    <a:lnR w="0">
+                      <a:noFill/>
+                    </a:lnR>
+                    <a:lnT w="0">
+                      <a:noFill/>
+                    </a:lnT>
+                    <a:lnB w="9525">
+                      <a:solidFill>
+                        <a:srgbClr val="E2E2E2"/>
+                      </a:solidFill>
+                    </a:lnB>
+                  </a:tcPr>
+                </a:tc>
+                <a:tc>
+                  <a:txBody>
+                    <a:bodyPr/>
+                    <a:lstStyle/>
+                    <a:p>
+                      <a:r>
+                        <a:rPr sz="1300" b="0">
+                          <a:solidFill>
+                            <a:srgbClr val="5E5E5E"/>
+                          </a:solidFill>
+                          <a:latin typeface="Pretendard Medium"/>
+                        </a:rPr>
+                        <a:t>통행 패턴 그룹화</a:t>
+                      </a:r>
+                    </a:p>
+                  </a:txBody>
+                  <a:tcPr marL="101600" marR="101600" marT="101600" marB="101600" anchor="ctr">
+                    <a:solidFill>
+                      <a:srgbClr val="FFFFFF"/>
+                    </a:solidFill>
+                    <a:lnL w="0">
+                      <a:noFill/>
+                    </a:lnL>
+                    <a:lnR w="0">
+                      <a:noFill/>
+                    </a:lnR>
+                    <a:lnT w="0">
+                      <a:noFill/>
+                    </a:lnT>
+                    <a:lnB w="9525">
+                      <a:solidFill>
+                        <a:srgbClr val="E2E2E2"/>
+                      </a:solidFill>
+                    </a:lnB>
+                  </a:tcPr>
+                </a:tc>
+              </a:tr>
+              <a:tr h="635000">
+                <a:tc>
+                  <a:txBody>
+                    <a:bodyPr/>
+                    <a:lstStyle/>
+                    <a:p>
+                      <a:r>
+                        <a:rPr sz="1300" b="1">
+                          <a:solidFill>
+                            <a:srgbClr val="000000"/>
+                          </a:solidFill>
+                          <a:latin typeface="Pretendard"/>
+                        </a:rPr>
+                        <a:t>신용카드 부정 거래 감지</a:t>
+                      </a:r>
+                    </a:p>
+                  </a:txBody>
+                  <a:tcPr marL="101600" marR="101600" marT="101600" marB="101600" anchor="ctr">
+                    <a:solidFill>
+                      <a:srgbClr val="FFFFFF"/>
+                    </a:solidFill>
+                    <a:lnL w="0">
+                      <a:noFill/>
+                    </a:lnL>
+                    <a:lnR w="0">
+                      <a:noFill/>
+                    </a:lnR>
+                    <a:lnT w="0">
+                      <a:noFill/>
+                    </a:lnT>
+                    <a:lnB w="9525">
+                      <a:solidFill>
+                        <a:srgbClr val="E2E2E2"/>
+                      </a:solidFill>
+                    </a:lnB>
+                  </a:tcPr>
+                </a:tc>
+                <a:tc>
+                  <a:txBody>
+                    <a:bodyPr/>
+                    <a:lstStyle/>
+                    <a:p>
+                      <a:r>
+                        <a:rPr sz="1300" b="0">
+                          <a:solidFill>
+                            <a:srgbClr val="5E5E5E"/>
+                          </a:solidFill>
+                          <a:latin typeface="Pretendard Medium"/>
+                        </a:rPr>
+                        <a:t>이상치 탐지</a:t>
+                      </a:r>
+                    </a:p>
+                  </a:txBody>
+                  <a:tcPr marL="101600" marR="101600" marT="101600" marB="101600" anchor="ctr">
+                    <a:solidFill>
+                      <a:srgbClr val="FFFFFF"/>
+                    </a:solidFill>
+                    <a:lnL w="0">
+                      <a:noFill/>
+                    </a:lnL>
+                    <a:lnR w="0">
+                      <a:noFill/>
+                    </a:lnR>
+                    <a:lnT w="0">
+                      <a:noFill/>
+                    </a:lnT>
+                    <a:lnB w="9525">
+                      <a:solidFill>
+                        <a:srgbClr val="E2E2E2"/>
+                      </a:solidFill>
+                    </a:lnB>
+                  </a:tcPr>
+                </a:tc>
+                <a:tc>
+                  <a:txBody>
+                    <a:bodyPr/>
+                    <a:lstStyle/>
+                    <a:p>
+                      <a:r>
+                        <a:rPr sz="1300" b="0">
+                          <a:solidFill>
+                            <a:srgbClr val="5E5E5E"/>
+                          </a:solidFill>
+                          <a:latin typeface="Pretendard Medium"/>
+                        </a:rPr>
+                        <a:t>이상 운행 감지</a:t>
+                      </a:r>
+                    </a:p>
+                  </a:txBody>
+                  <a:tcPr marL="101600" marR="101600" marT="101600" marB="101600" anchor="ctr">
+                    <a:solidFill>
+                      <a:srgbClr val="FFFFFF"/>
+                    </a:solidFill>
+                    <a:lnL w="0">
+                      <a:noFill/>
+                    </a:lnL>
+                    <a:lnR w="0">
+                      <a:noFill/>
+                    </a:lnR>
+                    <a:lnT w="0">
+                      <a:noFill/>
+                    </a:lnT>
+                    <a:lnB w="9525">
+                      <a:solidFill>
+                        <a:srgbClr val="E2E2E2"/>
+                      </a:solidFill>
+                    </a:lnB>
+                  </a:tcPr>
+                </a:tc>
+              </a:tr>
+              <a:tr h="635000">
+                <a:tc>
+                  <a:txBody>
+                    <a:bodyPr/>
+                    <a:lstStyle/>
+                    <a:p>
+                      <a:r>
+                        <a:rPr sz="1300" b="1">
+                          <a:solidFill>
+                            <a:srgbClr val="000000"/>
+                          </a:solidFill>
+                          <a:latin typeface="Pretendard"/>
+                        </a:rPr>
+                        <a:t>지능형 게임 봇</a:t>
+                      </a:r>
+                    </a:p>
+                  </a:txBody>
+                  <a:tcPr marL="101600" marR="101600" marT="101600" marB="101600" anchor="ctr">
+                    <a:solidFill>
+                      <a:srgbClr val="FFFFFF"/>
+                    </a:solidFill>
+                    <a:lnL w="0">
+                      <a:noFill/>
+                    </a:lnL>
+                    <a:lnR w="0">
+                      <a:noFill/>
+                    </a:lnR>
+                    <a:lnT w="0">
+                      <a:noFill/>
+                    </a:lnT>
+                    <a:lnB w="9525">
+                      <a:solidFill>
+                        <a:srgbClr val="E2E2E2"/>
+                      </a:solidFill>
+                    </a:lnB>
+                  </a:tcPr>
+                </a:tc>
+                <a:tc>
+                  <a:txBody>
+                    <a:bodyPr/>
+                    <a:lstStyle/>
+                    <a:p>
+                      <a:r>
+                        <a:rPr sz="1300" b="0">
+                          <a:solidFill>
+                            <a:srgbClr val="5E5E5E"/>
+                          </a:solidFill>
+                          <a:latin typeface="Pretendard Medium"/>
+                        </a:rPr>
+                        <a:t>강화 학습</a:t>
+                      </a:r>
+                    </a:p>
+                  </a:txBody>
+                  <a:tcPr marL="101600" marR="101600" marT="101600" marB="101600" anchor="ctr">
+                    <a:solidFill>
+                      <a:srgbClr val="FFFFFF"/>
+                    </a:solidFill>
+                    <a:lnL w="0">
+                      <a:noFill/>
+                    </a:lnL>
+                    <a:lnR w="0">
+                      <a:noFill/>
+                    </a:lnR>
+                    <a:lnT w="0">
+                      <a:noFill/>
+                    </a:lnT>
+                    <a:lnB w="9525">
+                      <a:solidFill>
+                        <a:srgbClr val="E2E2E2"/>
+                      </a:solidFill>
+                    </a:lnB>
+                  </a:tcPr>
+                </a:tc>
+                <a:tc>
+                  <a:txBody>
+                    <a:bodyPr/>
+                    <a:lstStyle/>
+                    <a:p>
+                      <a:r>
+                        <a:rPr sz="1300" b="0">
+                          <a:solidFill>
+                            <a:srgbClr val="5E5E5E"/>
+                          </a:solidFill>
+                          <a:latin typeface="Pretendard Medium"/>
+                        </a:rPr>
+                        <a:t>신호 제어</a:t>
+                      </a:r>
+                    </a:p>
+                  </a:txBody>
+                  <a:tcPr marL="101600" marR="101600" marT="101600" marB="101600" anchor="ctr">
+                    <a:solidFill>
+                      <a:srgbClr val="FFFFFF"/>
+                    </a:solidFill>
+                    <a:lnL w="0">
+                      <a:noFill/>
+                    </a:lnL>
+                    <a:lnR w="0">
+                      <a:noFill/>
+                    </a:lnR>
+                    <a:lnT w="0">
+                      <a:noFill/>
+                    </a:lnT>
+                    <a:lnB w="9525">
+                      <a:solidFill>
+                        <a:srgbClr val="E2E2E2"/>
+                      </a:solidFill>
+                    </a:lnB>
+                  </a:tcPr>
+                </a:tc>
+              </a:tr>
+            </a:tbl>
+          </a:graphicData>
+        </a:graphic>
+      </p:graphicFrame>
       <p:sp>
         <p:nvSpPr>
           <p:cNvPr id="25" name="Slide Number Placeholder 0"/>
@@ -9434,7 +12802,7 @@
             <a:pPr algn="r"/>
             <a:fld id="{F7021451-1387-4CA6-816F-3879F97B5CBC}" type="slidenum">
               <a:rPr b="0" lang="en-US"/>
-              <a:t>1004</a:t>
+              <a:t>1007</a:t>
             </a:fld>
             <a:endParaRPr lang="en-US"/>
           </a:p>
@@ -9529,7 +12897,7 @@
               <a:t>2.1  </a:t>
             </a:r>
             <a:r>
-              <a:t>세 개의 축</a:t>
+              <a:t>세 가지 분류 기준</a:t>
             </a:r>
           </a:p>
           <a:p>
@@ -9547,7 +12915,7 @@
               <a:t>2.2  </a:t>
             </a:r>
             <a:r>
-              <a:t>훈련 지도 방식</a:t>
+              <a:t>지도 학습과 비지도 학습</a:t>
             </a:r>
           </a:p>
           <a:p>
@@ -9565,7 +12933,7 @@
               <a:t>2.3  </a:t>
             </a:r>
             <a:r>
-              <a:t>배치 학습과 온라인 학습</a:t>
+              <a:t>준지도·자기 지도·강화 학습</a:t>
             </a:r>
           </a:p>
           <a:p>
@@ -9583,7 +12951,25 @@
               <a:t>2.4  </a:t>
             </a:r>
             <a:r>
-              <a:t>사례 기반과 모델 기반</a:t>
+              <a:t>배치 학습과 온라인 학습</a:t>
+            </a:r>
+          </a:p>
+          <a:p>
+            <a:pPr>
+              <a:spcAft>
+                <a:spcPts val="1000"/>
+              </a:spcAft>
+            </a:pPr>
+            <a:r>
+              <a:rPr>
+                <a:solidFill>
+                  <a:srgbClr val="AFAFAF"/>
+                </a:solidFill>
+              </a:rPr>
+              <a:t>2.5  </a:t>
+            </a:r>
+            <a:r>
+              <a:t>사례 기반 학습과 모델 기반 학습</a:t>
             </a:r>
           </a:p>
         </p:txBody>
@@ -9622,7 +13008,7 @@
           <a:lstStyle/>
           <a:p>
             <a:r>
-              <a:t>2.1 세 개의 축</a:t>
+              <a:t>2.1 세 가지 분류 기준</a:t>
             </a:r>
           </a:p>
         </p:txBody>
@@ -9665,25 +13051,43 @@
           <a:p>
             <a:pPr/>
             <a:r>
-              <a:t>훈련 지도 방식 — 레이블이 있는가</a:t>
+              <a:rPr b="1">
+                <a:latin typeface="Pretendard"/>
+              </a:rPr>
+              <a:t>훈련 지도 방식</a:t>
+            </a:r>
+            <a:r>
+              <a:t> — 지도, 비지도, 준지도, 자기 지도, 강화</a:t>
             </a:r>
           </a:p>
           <a:p>
             <a:pPr/>
             <a:r>
-              <a:t>학습 시점 — 한 번에 학습하는가, 점진적으로 하는가</a:t>
+              <a:rPr b="1">
+                <a:latin typeface="Pretendard"/>
+              </a:rPr>
+              <a:t>점진적 학습 여부</a:t>
+            </a:r>
+            <a:r>
+              <a:t> — 배치 학습과 온라인 학습</a:t>
             </a:r>
           </a:p>
           <a:p>
             <a:pPr/>
             <a:r>
-              <a:t>일반화 방식 — 사례를 비교하는가, 식으로 요약하는가</a:t>
+              <a:rPr b="1">
+                <a:latin typeface="Pretendard"/>
+              </a:rPr>
+              <a:t>일반화 방식</a:t>
+            </a:r>
+            <a:r>
+              <a:t> — 사례 기반과 모델 기반</a:t>
             </a:r>
           </a:p>
           <a:p>
             <a:pPr/>
             <a:r>
-              <a:t>세 축은 조합 — 하나를 골라도 나머지는 정해지지 않음</a:t>
+              <a:t>세 기준은 배타적이지 않고 원하는 대로 연결</a:t>
             </a:r>
           </a:p>
         </p:txBody>
